--- a/Népességszámlálás 2025.pptx
+++ b/Népességszámlálás 2025.pptx
@@ -12,6 +12,9 @@
     <p:sldId id="260" r:id="rId6"/>
     <p:sldId id="261" r:id="rId7"/>
     <p:sldId id="262" r:id="rId8"/>
+    <p:sldId id="263" r:id="rId9"/>
+    <p:sldId id="264" r:id="rId10"/>
+    <p:sldId id="265" r:id="rId11"/>
   </p:sldIdLst>
   <p:sldSz cx="12192000" cy="6858000"/>
   <p:notesSz cx="6858000" cy="9144000"/>
@@ -110,6 +113,11 @@
       </a:defRPr>
     </a:lvl9pPr>
   </p:defaultTextStyle>
+  <p:extLst>
+    <p:ext uri="{EFAFB233-063F-42B5-8137-9DF3F51BA10A}">
+      <p15:sldGuideLst xmlns:p15="http://schemas.microsoft.com/office/powerpoint/2012/main"/>
+    </p:ext>
+  </p:extLst>
 </p:presentation>
 </file>
 
@@ -260,7 +268,7 @@
           <a:p>
             <a:fld id="{FD7D69B1-10D7-4CD1-84F8-7D7D689F1ECE}" type="datetimeFigureOut">
               <a:rPr lang="hu-HU" smtClean="0"/>
-              <a:t>2026. 09. 15.</a:t>
+              <a:t>2026. 09. 16.</a:t>
             </a:fld>
             <a:endParaRPr lang="hu-HU"/>
           </a:p>
@@ -458,7 +466,7 @@
           <a:p>
             <a:fld id="{FD7D69B1-10D7-4CD1-84F8-7D7D689F1ECE}" type="datetimeFigureOut">
               <a:rPr lang="hu-HU" smtClean="0"/>
-              <a:t>2026. 09. 15.</a:t>
+              <a:t>2026. 09. 16.</a:t>
             </a:fld>
             <a:endParaRPr lang="hu-HU"/>
           </a:p>
@@ -666,7 +674,7 @@
           <a:p>
             <a:fld id="{FD7D69B1-10D7-4CD1-84F8-7D7D689F1ECE}" type="datetimeFigureOut">
               <a:rPr lang="hu-HU" smtClean="0"/>
-              <a:t>2026. 09. 15.</a:t>
+              <a:t>2026. 09. 16.</a:t>
             </a:fld>
             <a:endParaRPr lang="hu-HU"/>
           </a:p>
@@ -864,7 +872,7 @@
           <a:p>
             <a:fld id="{FD7D69B1-10D7-4CD1-84F8-7D7D689F1ECE}" type="datetimeFigureOut">
               <a:rPr lang="hu-HU" smtClean="0"/>
-              <a:t>2026. 09. 15.</a:t>
+              <a:t>2026. 09. 16.</a:t>
             </a:fld>
             <a:endParaRPr lang="hu-HU"/>
           </a:p>
@@ -1139,7 +1147,7 @@
           <a:p>
             <a:fld id="{FD7D69B1-10D7-4CD1-84F8-7D7D689F1ECE}" type="datetimeFigureOut">
               <a:rPr lang="hu-HU" smtClean="0"/>
-              <a:t>2026. 09. 15.</a:t>
+              <a:t>2026. 09. 16.</a:t>
             </a:fld>
             <a:endParaRPr lang="hu-HU"/>
           </a:p>
@@ -1404,7 +1412,7 @@
           <a:p>
             <a:fld id="{FD7D69B1-10D7-4CD1-84F8-7D7D689F1ECE}" type="datetimeFigureOut">
               <a:rPr lang="hu-HU" smtClean="0"/>
-              <a:t>2026. 09. 15.</a:t>
+              <a:t>2026. 09. 16.</a:t>
             </a:fld>
             <a:endParaRPr lang="hu-HU"/>
           </a:p>
@@ -1816,7 +1824,7 @@
           <a:p>
             <a:fld id="{FD7D69B1-10D7-4CD1-84F8-7D7D689F1ECE}" type="datetimeFigureOut">
               <a:rPr lang="hu-HU" smtClean="0"/>
-              <a:t>2026. 09. 15.</a:t>
+              <a:t>2026. 09. 16.</a:t>
             </a:fld>
             <a:endParaRPr lang="hu-HU"/>
           </a:p>
@@ -1957,7 +1965,7 @@
           <a:p>
             <a:fld id="{FD7D69B1-10D7-4CD1-84F8-7D7D689F1ECE}" type="datetimeFigureOut">
               <a:rPr lang="hu-HU" smtClean="0"/>
-              <a:t>2026. 09. 15.</a:t>
+              <a:t>2026. 09. 16.</a:t>
             </a:fld>
             <a:endParaRPr lang="hu-HU"/>
           </a:p>
@@ -2070,7 +2078,7 @@
           <a:p>
             <a:fld id="{FD7D69B1-10D7-4CD1-84F8-7D7D689F1ECE}" type="datetimeFigureOut">
               <a:rPr lang="hu-HU" smtClean="0"/>
-              <a:t>2026. 09. 15.</a:t>
+              <a:t>2026. 09. 16.</a:t>
             </a:fld>
             <a:endParaRPr lang="hu-HU"/>
           </a:p>
@@ -2381,7 +2389,7 @@
           <a:p>
             <a:fld id="{FD7D69B1-10D7-4CD1-84F8-7D7D689F1ECE}" type="datetimeFigureOut">
               <a:rPr lang="hu-HU" smtClean="0"/>
-              <a:t>2026. 09. 15.</a:t>
+              <a:t>2026. 09. 16.</a:t>
             </a:fld>
             <a:endParaRPr lang="hu-HU"/>
           </a:p>
@@ -2669,7 +2677,7 @@
           <a:p>
             <a:fld id="{FD7D69B1-10D7-4CD1-84F8-7D7D689F1ECE}" type="datetimeFigureOut">
               <a:rPr lang="hu-HU" smtClean="0"/>
-              <a:t>2026. 09. 15.</a:t>
+              <a:t>2026. 09. 16.</a:t>
             </a:fld>
             <a:endParaRPr lang="hu-HU"/>
           </a:p>
@@ -2910,7 +2918,7 @@
           <a:p>
             <a:fld id="{FD7D69B1-10D7-4CD1-84F8-7D7D689F1ECE}" type="datetimeFigureOut">
               <a:rPr lang="hu-HU" smtClean="0"/>
-              <a:t>2026. 09. 15.</a:t>
+              <a:t>2026. 09. 16.</a:t>
             </a:fld>
             <a:endParaRPr lang="hu-HU"/>
           </a:p>
@@ -3429,6 +3437,490 @@
   <p:clrMapOvr>
     <a:masterClrMapping/>
   </p:clrMapOvr>
+  <p:transition spd="slow" advClick="0" advTm="1000">
+    <p:wipe/>
+  </p:transition>
+</p:sld>
+</file>
+
+<file path=ppt/slides/slide10.xml><?xml version="1.0" encoding="utf-8"?>
+<p:sld xmlns:a="http://schemas.openxmlformats.org/drawingml/2006/main" xmlns:r="http://schemas.openxmlformats.org/officeDocument/2006/relationships" xmlns:p="http://schemas.openxmlformats.org/presentationml/2006/main">
+  <p:cSld>
+    <p:bg>
+      <p:bgPr>
+        <a:gradFill>
+          <a:gsLst>
+            <a:gs pos="0">
+              <a:schemeClr val="accent4">
+                <a:lumMod val="75000"/>
+              </a:schemeClr>
+            </a:gs>
+            <a:gs pos="100000">
+              <a:schemeClr val="accent2">
+                <a:lumMod val="50000"/>
+              </a:schemeClr>
+            </a:gs>
+          </a:gsLst>
+          <a:lin ang="5400000" scaled="1"/>
+        </a:gradFill>
+        <a:effectLst/>
+      </p:bgPr>
+    </p:bg>
+    <p:spTree>
+      <p:nvGrpSpPr>
+        <p:cNvPr id="1" name="">
+          <a:extLst>
+            <a:ext uri="{FF2B5EF4-FFF2-40B4-BE49-F238E27FC236}">
+              <a16:creationId xmlns:a16="http://schemas.microsoft.com/office/drawing/2014/main" id="{9B2B1F37-100E-DC91-DDA3-579D9D356979}"/>
+            </a:ext>
+          </a:extLst>
+        </p:cNvPr>
+        <p:cNvGrpSpPr/>
+        <p:nvPr/>
+      </p:nvGrpSpPr>
+      <p:grpSpPr>
+        <a:xfrm>
+          <a:off x="0" y="0"/>
+          <a:ext cx="0" cy="0"/>
+          <a:chOff x="0" y="0"/>
+          <a:chExt cx="0" cy="0"/>
+        </a:xfrm>
+      </p:grpSpPr>
+      <p:sp>
+        <p:nvSpPr>
+          <p:cNvPr id="2" name="Cím 1">
+            <a:extLst>
+              <a:ext uri="{FF2B5EF4-FFF2-40B4-BE49-F238E27FC236}">
+                <a16:creationId xmlns:a16="http://schemas.microsoft.com/office/drawing/2014/main" id="{F2FA08D1-C27B-BAD3-965E-692C027CF2CB}"/>
+              </a:ext>
+            </a:extLst>
+          </p:cNvPr>
+          <p:cNvSpPr>
+            <a:spLocks noGrp="1"/>
+          </p:cNvSpPr>
+          <p:nvPr>
+            <p:ph type="title"/>
+          </p:nvPr>
+        </p:nvSpPr>
+        <p:spPr>
+          <a:xfrm>
+            <a:off x="838199" y="-182242"/>
+            <a:ext cx="10515600" cy="1325563"/>
+          </a:xfrm>
+        </p:spPr>
+        <p:txBody>
+          <a:bodyPr/>
+          <a:lstStyle/>
+          <a:p>
+            <a:pPr algn="ctr"/>
+            <a:r>
+              <a:rPr lang="hu-HU" dirty="0">
+                <a:solidFill>
+                  <a:schemeClr val="bg1"/>
+                </a:solidFill>
+                <a:latin typeface="Comic Sans MS" panose="030F0702030302020204" pitchFamily="66" charset="0"/>
+              </a:rPr>
+              <a:t>Használati utasítás</a:t>
+            </a:r>
+          </a:p>
+        </p:txBody>
+      </p:sp>
+      <p:sp>
+        <p:nvSpPr>
+          <p:cNvPr id="3" name="Tartalom helye 2">
+            <a:extLst>
+              <a:ext uri="{FF2B5EF4-FFF2-40B4-BE49-F238E27FC236}">
+                <a16:creationId xmlns:a16="http://schemas.microsoft.com/office/drawing/2014/main" id="{1EDED3B9-EDD3-1892-18E9-DF20E1337EA9}"/>
+              </a:ext>
+            </a:extLst>
+          </p:cNvPr>
+          <p:cNvSpPr>
+            <a:spLocks noGrp="1"/>
+          </p:cNvSpPr>
+          <p:nvPr>
+            <p:ph idx="1"/>
+          </p:nvPr>
+        </p:nvSpPr>
+        <p:spPr>
+          <a:xfrm>
+            <a:off x="537131" y="872534"/>
+            <a:ext cx="11117736" cy="4351338"/>
+          </a:xfrm>
+        </p:spPr>
+        <p:txBody>
+          <a:bodyPr/>
+          <a:lstStyle/>
+          <a:p>
+            <a:pPr algn="ctr"/>
+            <a:r>
+              <a:rPr lang="hu-HU" dirty="0">
+                <a:solidFill>
+                  <a:schemeClr val="bg1"/>
+                </a:solidFill>
+                <a:latin typeface="Comic Sans MS" panose="030F0702030302020204" pitchFamily="66" charset="0"/>
+              </a:rPr>
+              <a:t>N-karakter begépelése után lapozni lehet.</a:t>
+            </a:r>
+          </a:p>
+          <a:p>
+            <a:pPr algn="ctr"/>
+            <a:r>
+              <a:rPr lang="hu-HU" dirty="0">
+                <a:solidFill>
+                  <a:schemeClr val="bg1"/>
+                </a:solidFill>
+                <a:latin typeface="Comic Sans MS" panose="030F0702030302020204" pitchFamily="66" charset="0"/>
+              </a:rPr>
+              <a:t>B-karakter begépelése után vissza lehet lapozni.</a:t>
+            </a:r>
+          </a:p>
+          <a:p>
+            <a:pPr algn="ctr"/>
+            <a:r>
+              <a:rPr lang="hu-HU" dirty="0">
+                <a:solidFill>
+                  <a:schemeClr val="bg1"/>
+                </a:solidFill>
+                <a:latin typeface="Comic Sans MS" panose="030F0702030302020204" pitchFamily="66" charset="0"/>
+              </a:rPr>
+              <a:t>Q-karakter begépelése után a program visszatér a főmenübe.</a:t>
+            </a:r>
+          </a:p>
+          <a:p>
+            <a:pPr algn="ctr"/>
+            <a:endParaRPr lang="hu-HU" dirty="0">
+              <a:solidFill>
+                <a:schemeClr val="bg1"/>
+              </a:solidFill>
+              <a:latin typeface="Comic Sans MS" panose="030F0702030302020204" pitchFamily="66" charset="0"/>
+            </a:endParaRPr>
+          </a:p>
+          <a:p>
+            <a:pPr algn="ctr"/>
+            <a:endParaRPr lang="hu-HU" dirty="0">
+              <a:solidFill>
+                <a:schemeClr val="bg1"/>
+              </a:solidFill>
+              <a:latin typeface="Comic Sans MS" panose="030F0702030302020204" pitchFamily="66" charset="0"/>
+            </a:endParaRPr>
+          </a:p>
+        </p:txBody>
+      </p:sp>
+      <p:pic>
+        <p:nvPicPr>
+          <p:cNvPr id="5" name="Kép 4">
+            <a:extLst>
+              <a:ext uri="{FF2B5EF4-FFF2-40B4-BE49-F238E27FC236}">
+                <a16:creationId xmlns:a16="http://schemas.microsoft.com/office/drawing/2014/main" id="{80E9D85F-95E5-4E1C-8A62-499818D939C9}"/>
+              </a:ext>
+            </a:extLst>
+          </p:cNvPr>
+          <p:cNvPicPr>
+            <a:picLocks noChangeAspect="1"/>
+          </p:cNvPicPr>
+          <p:nvPr/>
+        </p:nvPicPr>
+        <p:blipFill>
+          <a:blip r:embed="rId2"/>
+          <a:stretch>
+            <a:fillRect/>
+          </a:stretch>
+        </p:blipFill>
+        <p:spPr>
+          <a:xfrm>
+            <a:off x="1985703" y="2314768"/>
+            <a:ext cx="8220592" cy="2612375"/>
+          </a:xfrm>
+          <a:prstGeom prst="rect">
+            <a:avLst/>
+          </a:prstGeom>
+        </p:spPr>
+      </p:pic>
+      <p:sp>
+        <p:nvSpPr>
+          <p:cNvPr id="7" name="Nyíl: balra mutató 6">
+            <a:hlinkClick r:id="rId3" action="ppaction://hlinksldjump"/>
+            <a:extLst>
+              <a:ext uri="{FF2B5EF4-FFF2-40B4-BE49-F238E27FC236}">
+                <a16:creationId xmlns:a16="http://schemas.microsoft.com/office/drawing/2014/main" id="{A461F5D0-7BE7-BB9D-7ADE-67CE2E7F4276}"/>
+              </a:ext>
+            </a:extLst>
+          </p:cNvPr>
+          <p:cNvSpPr/>
+          <p:nvPr/>
+        </p:nvSpPr>
+        <p:spPr>
+          <a:xfrm>
+            <a:off x="1985703" y="5223873"/>
+            <a:ext cx="2875175" cy="1325563"/>
+          </a:xfrm>
+          <a:prstGeom prst="leftArrow">
+            <a:avLst/>
+          </a:prstGeom>
+          <a:solidFill>
+            <a:schemeClr val="bg1"/>
+          </a:solidFill>
+          <a:ln w="63500">
+            <a:gradFill>
+              <a:gsLst>
+                <a:gs pos="0">
+                  <a:schemeClr val="accent4">
+                    <a:lumMod val="75000"/>
+                  </a:schemeClr>
+                </a:gs>
+                <a:gs pos="100000">
+                  <a:schemeClr val="accent2">
+                    <a:lumMod val="50000"/>
+                  </a:schemeClr>
+                </a:gs>
+              </a:gsLst>
+              <a:lin ang="5400000" scaled="1"/>
+            </a:gradFill>
+          </a:ln>
+        </p:spPr>
+        <p:style>
+          <a:lnRef idx="2">
+            <a:schemeClr val="accent1">
+              <a:shade val="15000"/>
+            </a:schemeClr>
+          </a:lnRef>
+          <a:fillRef idx="1">
+            <a:schemeClr val="accent1"/>
+          </a:fillRef>
+          <a:effectRef idx="0">
+            <a:schemeClr val="accent1"/>
+          </a:effectRef>
+          <a:fontRef idx="minor">
+            <a:schemeClr val="lt1"/>
+          </a:fontRef>
+        </p:style>
+        <p:txBody>
+          <a:bodyPr rtlCol="0" anchor="ctr"/>
+          <a:lstStyle/>
+          <a:p>
+            <a:pPr algn="ctr"/>
+            <a:r>
+              <a:rPr lang="hu-HU" sz="3200" dirty="0">
+                <a:solidFill>
+                  <a:schemeClr val="tx1"/>
+                </a:solidFill>
+                <a:latin typeface="Comic Sans MS" panose="030F0702030302020204" pitchFamily="66" charset="0"/>
+              </a:rPr>
+              <a:t>Főmenü</a:t>
+            </a:r>
+          </a:p>
+        </p:txBody>
+      </p:sp>
+      <p:pic>
+        <p:nvPicPr>
+          <p:cNvPr id="6" name="Kép 5">
+            <a:extLst>
+              <a:ext uri="{FF2B5EF4-FFF2-40B4-BE49-F238E27FC236}">
+                <a16:creationId xmlns:a16="http://schemas.microsoft.com/office/drawing/2014/main" id="{388B69BE-2DB5-D5A5-B0F0-5E8E05135440}"/>
+              </a:ext>
+            </a:extLst>
+          </p:cNvPr>
+          <p:cNvPicPr>
+            <a:picLocks noChangeAspect="1"/>
+          </p:cNvPicPr>
+          <p:nvPr/>
+        </p:nvPicPr>
+        <p:blipFill>
+          <a:blip r:embed="rId4"/>
+          <a:stretch>
+            <a:fillRect/>
+          </a:stretch>
+        </p:blipFill>
+        <p:spPr>
+          <a:xfrm>
+            <a:off x="1985703" y="2314767"/>
+            <a:ext cx="8220592" cy="2612375"/>
+          </a:xfrm>
+          <a:prstGeom prst="rect">
+            <a:avLst/>
+          </a:prstGeom>
+        </p:spPr>
+      </p:pic>
+      <p:pic>
+        <p:nvPicPr>
+          <p:cNvPr id="8" name="Kép 7">
+            <a:extLst>
+              <a:ext uri="{FF2B5EF4-FFF2-40B4-BE49-F238E27FC236}">
+                <a16:creationId xmlns:a16="http://schemas.microsoft.com/office/drawing/2014/main" id="{484CD6EF-7C16-7E1A-869E-80092F76ACBB}"/>
+              </a:ext>
+            </a:extLst>
+          </p:cNvPr>
+          <p:cNvPicPr>
+            <a:picLocks noChangeAspect="1"/>
+          </p:cNvPicPr>
+          <p:nvPr/>
+        </p:nvPicPr>
+        <p:blipFill>
+          <a:blip r:embed="rId5"/>
+          <a:stretch>
+            <a:fillRect/>
+          </a:stretch>
+        </p:blipFill>
+        <p:spPr>
+          <a:xfrm>
+            <a:off x="1985703" y="2343224"/>
+            <a:ext cx="8220592" cy="2612376"/>
+          </a:xfrm>
+          <a:prstGeom prst="rect">
+            <a:avLst/>
+          </a:prstGeom>
+        </p:spPr>
+      </p:pic>
+      <p:pic>
+        <p:nvPicPr>
+          <p:cNvPr id="9" name="Kép 8">
+            <a:extLst>
+              <a:ext uri="{FF2B5EF4-FFF2-40B4-BE49-F238E27FC236}">
+                <a16:creationId xmlns:a16="http://schemas.microsoft.com/office/drawing/2014/main" id="{5537B0A9-7B69-BC8A-091E-E40E4AA0113D}"/>
+              </a:ext>
+            </a:extLst>
+          </p:cNvPr>
+          <p:cNvPicPr>
+            <a:picLocks noChangeAspect="1"/>
+          </p:cNvPicPr>
+          <p:nvPr/>
+        </p:nvPicPr>
+        <p:blipFill>
+          <a:blip r:embed="rId6"/>
+          <a:stretch>
+            <a:fillRect/>
+          </a:stretch>
+        </p:blipFill>
+        <p:spPr>
+          <a:xfrm>
+            <a:off x="1986853" y="2314766"/>
+            <a:ext cx="8219442" cy="2639362"/>
+          </a:xfrm>
+          <a:prstGeom prst="rect">
+            <a:avLst/>
+          </a:prstGeom>
+        </p:spPr>
+      </p:pic>
+      <p:pic>
+        <p:nvPicPr>
+          <p:cNvPr id="11" name="Kép 10">
+            <a:extLst>
+              <a:ext uri="{FF2B5EF4-FFF2-40B4-BE49-F238E27FC236}">
+                <a16:creationId xmlns:a16="http://schemas.microsoft.com/office/drawing/2014/main" id="{99707F7D-11F0-5DD9-21D9-6A8348497727}"/>
+              </a:ext>
+            </a:extLst>
+          </p:cNvPr>
+          <p:cNvPicPr>
+            <a:picLocks noChangeAspect="1"/>
+          </p:cNvPicPr>
+          <p:nvPr/>
+        </p:nvPicPr>
+        <p:blipFill>
+          <a:blip r:embed="rId7"/>
+          <a:stretch>
+            <a:fillRect/>
+          </a:stretch>
+        </p:blipFill>
+        <p:spPr>
+          <a:xfrm>
+            <a:off x="1985703" y="2343223"/>
+            <a:ext cx="8219442" cy="2639362"/>
+          </a:xfrm>
+          <a:prstGeom prst="rect">
+            <a:avLst/>
+          </a:prstGeom>
+        </p:spPr>
+      </p:pic>
+    </p:spTree>
+    <p:extLst>
+      <p:ext uri="{BB962C8B-B14F-4D97-AF65-F5344CB8AC3E}">
+        <p14:creationId xmlns:p14="http://schemas.microsoft.com/office/powerpoint/2010/main" val="300085399"/>
+      </p:ext>
+    </p:extLst>
+  </p:cSld>
+  <p:clrMapOvr>
+    <a:masterClrMapping/>
+  </p:clrMapOvr>
+  <p:timing>
+    <p:tnLst>
+      <p:par>
+        <p:cTn id="1" dur="indefinite" restart="never" nodeType="tmRoot">
+          <p:childTnLst>
+            <p:seq concurrent="1" nextAc="seek">
+              <p:cTn id="2" dur="indefinite" nodeType="mainSeq">
+                <p:childTnLst>
+                  <p:par>
+                    <p:cTn id="3" fill="hold">
+                      <p:stCondLst>
+                        <p:cond delay="indefinite"/>
+                        <p:cond evt="onBegin" delay="0">
+                          <p:tn val="2"/>
+                        </p:cond>
+                      </p:stCondLst>
+                      <p:childTnLst>
+                        <p:par>
+                          <p:cTn id="4" fill="hold">
+                            <p:stCondLst>
+                              <p:cond delay="0"/>
+                            </p:stCondLst>
+                            <p:childTnLst>
+                              <p:par>
+                                <p:cTn id="5" presetID="26" presetClass="emph" presetSubtype="0" repeatCount="indefinite" fill="hold" grpId="0" nodeType="withEffect">
+                                  <p:stCondLst>
+                                    <p:cond delay="0"/>
+                                  </p:stCondLst>
+                                  <p:childTnLst>
+                                    <p:animEffect transition="out" filter="fade">
+                                      <p:cBhvr>
+                                        <p:cTn id="6" dur="2000" tmFilter="0, 0; .2, .5; .8, .5; 1, 0"/>
+                                        <p:tgtEl>
+                                          <p:spTgt spid="7"/>
+                                        </p:tgtEl>
+                                      </p:cBhvr>
+                                    </p:animEffect>
+                                    <p:animScale>
+                                      <p:cBhvr>
+                                        <p:cTn id="7" dur="1000" autoRev="1" fill="hold"/>
+                                        <p:tgtEl>
+                                          <p:spTgt spid="7"/>
+                                        </p:tgtEl>
+                                      </p:cBhvr>
+                                      <p:by x="105000" y="105000"/>
+                                    </p:animScale>
+                                  </p:childTnLst>
+                                </p:cTn>
+                              </p:par>
+                            </p:childTnLst>
+                          </p:cTn>
+                        </p:par>
+                      </p:childTnLst>
+                    </p:cTn>
+                  </p:par>
+                </p:childTnLst>
+              </p:cTn>
+              <p:prevCondLst>
+                <p:cond evt="onPrev" delay="0">
+                  <p:tgtEl>
+                    <p:sldTgt/>
+                  </p:tgtEl>
+                </p:cond>
+              </p:prevCondLst>
+              <p:nextCondLst>
+                <p:cond evt="onNext" delay="0">
+                  <p:tgtEl>
+                    <p:sldTgt/>
+                  </p:tgtEl>
+                </p:cond>
+              </p:nextCondLst>
+            </p:seq>
+          </p:childTnLst>
+        </p:cTn>
+      </p:par>
+    </p:tnLst>
+    <p:bldLst>
+      <p:bldP spid="7" grpId="0" animBg="1"/>
+    </p:bldLst>
+  </p:timing>
 </p:sld>
 </file>
 
@@ -3519,6 +4011,7 @@
       <p:sp>
         <p:nvSpPr>
           <p:cNvPr id="8" name="Ellipszis 7">
+            <a:hlinkClick r:id="rId2" action="ppaction://hlinksldjump"/>
             <a:extLst>
               <a:ext uri="{FF2B5EF4-FFF2-40B4-BE49-F238E27FC236}">
                 <a16:creationId xmlns:a16="http://schemas.microsoft.com/office/drawing/2014/main" id="{BB4C1756-3CC6-65B2-23C9-F02D6B096B30}"/>
@@ -3593,7 +4086,7 @@
       <p:sp>
         <p:nvSpPr>
           <p:cNvPr id="13" name="Nyíl: balra mutató 12">
-            <a:hlinkClick r:id="rId2" action="ppaction://hlinksldjump"/>
+            <a:hlinkClick r:id="rId3" action="ppaction://hlinksldjump"/>
             <a:extLst>
               <a:ext uri="{FF2B5EF4-FFF2-40B4-BE49-F238E27FC236}">
                 <a16:creationId xmlns:a16="http://schemas.microsoft.com/office/drawing/2014/main" id="{9E798FC5-ED3F-6FAD-32BD-81B5A5DC0ED8}"/>
@@ -3668,6 +4161,7 @@
       <p:sp>
         <p:nvSpPr>
           <p:cNvPr id="15" name="Ellipszis 14">
+            <a:hlinkClick r:id="rId4" action="ppaction://hlinksldjump"/>
             <a:extLst>
               <a:ext uri="{FF2B5EF4-FFF2-40B4-BE49-F238E27FC236}">
                 <a16:creationId xmlns:a16="http://schemas.microsoft.com/office/drawing/2014/main" id="{4AA60A35-8299-EB3D-C761-6781B927E4FC}"/>
@@ -3742,6 +4236,7 @@
       <p:sp>
         <p:nvSpPr>
           <p:cNvPr id="17" name="Ellipszis 16">
+            <a:hlinkClick r:id="rId5" action="ppaction://hlinksldjump"/>
             <a:extLst>
               <a:ext uri="{FF2B5EF4-FFF2-40B4-BE49-F238E27FC236}">
                 <a16:creationId xmlns:a16="http://schemas.microsoft.com/office/drawing/2014/main" id="{A6FBF401-3DDA-E1F6-DCC4-7260E7FDB6D2}"/>
@@ -3823,6 +4318,374 @@
   <p:clrMapOvr>
     <a:masterClrMapping/>
   </p:clrMapOvr>
+  <mc:AlternateContent xmlns:mc="http://schemas.openxmlformats.org/markup-compatibility/2006">
+    <mc:Choice xmlns:p14="http://schemas.microsoft.com/office/powerpoint/2010/main" Requires="p14">
+      <p:transition spd="med" p14:dur="700" advClick="0" advTm="5000">
+        <p:fade/>
+      </p:transition>
+    </mc:Choice>
+    <mc:Fallback>
+      <p:transition spd="med" advClick="0" advTm="5000">
+        <p:fade/>
+      </p:transition>
+    </mc:Fallback>
+  </mc:AlternateContent>
+  <p:timing>
+    <p:tnLst>
+      <p:par>
+        <p:cTn id="1" dur="indefinite" restart="never" nodeType="tmRoot">
+          <p:childTnLst>
+            <p:seq concurrent="1" nextAc="seek">
+              <p:cTn id="2" dur="indefinite" nodeType="mainSeq">
+                <p:childTnLst>
+                  <p:par>
+                    <p:cTn id="3" fill="hold">
+                      <p:stCondLst>
+                        <p:cond delay="indefinite"/>
+                        <p:cond evt="onBegin" delay="0">
+                          <p:tn val="2"/>
+                        </p:cond>
+                      </p:stCondLst>
+                      <p:childTnLst>
+                        <p:par>
+                          <p:cTn id="4" fill="hold">
+                            <p:stCondLst>
+                              <p:cond delay="0"/>
+                            </p:stCondLst>
+                            <p:childTnLst>
+                              <p:par>
+                                <p:cTn id="5" presetID="32" presetClass="emph" presetSubtype="0" repeatCount="indefinite" fill="hold" grpId="0" nodeType="withEffect">
+                                  <p:stCondLst>
+                                    <p:cond delay="0"/>
+                                  </p:stCondLst>
+                                  <p:endCondLst>
+                                    <p:cond evt="onNext" delay="0">
+                                      <p:tgtEl>
+                                        <p:sldTgt/>
+                                      </p:tgtEl>
+                                    </p:cond>
+                                  </p:endCondLst>
+                                  <p:childTnLst>
+                                    <p:animRot by="120000">
+                                      <p:cBhvr>
+                                        <p:cTn id="6" dur="200" fill="hold">
+                                          <p:stCondLst>
+                                            <p:cond delay="0"/>
+                                          </p:stCondLst>
+                                        </p:cTn>
+                                        <p:tgtEl>
+                                          <p:spTgt spid="15"/>
+                                        </p:tgtEl>
+                                        <p:attrNameLst>
+                                          <p:attrName>r</p:attrName>
+                                        </p:attrNameLst>
+                                      </p:cBhvr>
+                                    </p:animRot>
+                                    <p:animRot by="-240000">
+                                      <p:cBhvr>
+                                        <p:cTn id="7" dur="400" fill="hold">
+                                          <p:stCondLst>
+                                            <p:cond delay="400"/>
+                                          </p:stCondLst>
+                                        </p:cTn>
+                                        <p:tgtEl>
+                                          <p:spTgt spid="15"/>
+                                        </p:tgtEl>
+                                        <p:attrNameLst>
+                                          <p:attrName>r</p:attrName>
+                                        </p:attrNameLst>
+                                      </p:cBhvr>
+                                    </p:animRot>
+                                    <p:animRot by="240000">
+                                      <p:cBhvr>
+                                        <p:cTn id="8" dur="400" fill="hold">
+                                          <p:stCondLst>
+                                            <p:cond delay="800"/>
+                                          </p:stCondLst>
+                                        </p:cTn>
+                                        <p:tgtEl>
+                                          <p:spTgt spid="15"/>
+                                        </p:tgtEl>
+                                        <p:attrNameLst>
+                                          <p:attrName>r</p:attrName>
+                                        </p:attrNameLst>
+                                      </p:cBhvr>
+                                    </p:animRot>
+                                    <p:animRot by="-240000">
+                                      <p:cBhvr>
+                                        <p:cTn id="9" dur="400" fill="hold">
+                                          <p:stCondLst>
+                                            <p:cond delay="1200"/>
+                                          </p:stCondLst>
+                                        </p:cTn>
+                                        <p:tgtEl>
+                                          <p:spTgt spid="15"/>
+                                        </p:tgtEl>
+                                        <p:attrNameLst>
+                                          <p:attrName>r</p:attrName>
+                                        </p:attrNameLst>
+                                      </p:cBhvr>
+                                    </p:animRot>
+                                    <p:animRot by="120000">
+                                      <p:cBhvr>
+                                        <p:cTn id="10" dur="400" fill="hold">
+                                          <p:stCondLst>
+                                            <p:cond delay="1600"/>
+                                          </p:stCondLst>
+                                        </p:cTn>
+                                        <p:tgtEl>
+                                          <p:spTgt spid="15"/>
+                                        </p:tgtEl>
+                                        <p:attrNameLst>
+                                          <p:attrName>r</p:attrName>
+                                        </p:attrNameLst>
+                                      </p:cBhvr>
+                                    </p:animRot>
+                                  </p:childTnLst>
+                                </p:cTn>
+                              </p:par>
+                              <p:par>
+                                <p:cTn id="11" presetID="32" presetClass="emph" presetSubtype="0" repeatCount="indefinite" fill="hold" grpId="0" nodeType="withEffect">
+                                  <p:stCondLst>
+                                    <p:cond delay="0"/>
+                                  </p:stCondLst>
+                                  <p:endCondLst>
+                                    <p:cond evt="onNext" delay="0">
+                                      <p:tgtEl>
+                                        <p:sldTgt/>
+                                      </p:tgtEl>
+                                    </p:cond>
+                                  </p:endCondLst>
+                                  <p:childTnLst>
+                                    <p:animRot by="120000">
+                                      <p:cBhvr>
+                                        <p:cTn id="12" dur="200" fill="hold">
+                                          <p:stCondLst>
+                                            <p:cond delay="0"/>
+                                          </p:stCondLst>
+                                        </p:cTn>
+                                        <p:tgtEl>
+                                          <p:spTgt spid="8"/>
+                                        </p:tgtEl>
+                                        <p:attrNameLst>
+                                          <p:attrName>r</p:attrName>
+                                        </p:attrNameLst>
+                                      </p:cBhvr>
+                                    </p:animRot>
+                                    <p:animRot by="-240000">
+                                      <p:cBhvr>
+                                        <p:cTn id="13" dur="400" fill="hold">
+                                          <p:stCondLst>
+                                            <p:cond delay="400"/>
+                                          </p:stCondLst>
+                                        </p:cTn>
+                                        <p:tgtEl>
+                                          <p:spTgt spid="8"/>
+                                        </p:tgtEl>
+                                        <p:attrNameLst>
+                                          <p:attrName>r</p:attrName>
+                                        </p:attrNameLst>
+                                      </p:cBhvr>
+                                    </p:animRot>
+                                    <p:animRot by="240000">
+                                      <p:cBhvr>
+                                        <p:cTn id="14" dur="400" fill="hold">
+                                          <p:stCondLst>
+                                            <p:cond delay="800"/>
+                                          </p:stCondLst>
+                                        </p:cTn>
+                                        <p:tgtEl>
+                                          <p:spTgt spid="8"/>
+                                        </p:tgtEl>
+                                        <p:attrNameLst>
+                                          <p:attrName>r</p:attrName>
+                                        </p:attrNameLst>
+                                      </p:cBhvr>
+                                    </p:animRot>
+                                    <p:animRot by="-240000">
+                                      <p:cBhvr>
+                                        <p:cTn id="15" dur="400" fill="hold">
+                                          <p:stCondLst>
+                                            <p:cond delay="1200"/>
+                                          </p:stCondLst>
+                                        </p:cTn>
+                                        <p:tgtEl>
+                                          <p:spTgt spid="8"/>
+                                        </p:tgtEl>
+                                        <p:attrNameLst>
+                                          <p:attrName>r</p:attrName>
+                                        </p:attrNameLst>
+                                      </p:cBhvr>
+                                    </p:animRot>
+                                    <p:animRot by="120000">
+                                      <p:cBhvr>
+                                        <p:cTn id="16" dur="400" fill="hold">
+                                          <p:stCondLst>
+                                            <p:cond delay="1600"/>
+                                          </p:stCondLst>
+                                        </p:cTn>
+                                        <p:tgtEl>
+                                          <p:spTgt spid="8"/>
+                                        </p:tgtEl>
+                                        <p:attrNameLst>
+                                          <p:attrName>r</p:attrName>
+                                        </p:attrNameLst>
+                                      </p:cBhvr>
+                                    </p:animRot>
+                                  </p:childTnLst>
+                                </p:cTn>
+                              </p:par>
+                              <p:par>
+                                <p:cTn id="17" presetID="32" presetClass="emph" presetSubtype="0" repeatCount="indefinite" fill="hold" grpId="0" nodeType="withEffect">
+                                  <p:stCondLst>
+                                    <p:cond delay="0"/>
+                                  </p:stCondLst>
+                                  <p:endCondLst>
+                                    <p:cond evt="onNext" delay="0">
+                                      <p:tgtEl>
+                                        <p:sldTgt/>
+                                      </p:tgtEl>
+                                    </p:cond>
+                                  </p:endCondLst>
+                                  <p:childTnLst>
+                                    <p:animRot by="120000">
+                                      <p:cBhvr>
+                                        <p:cTn id="18" dur="200" fill="hold">
+                                          <p:stCondLst>
+                                            <p:cond delay="0"/>
+                                          </p:stCondLst>
+                                        </p:cTn>
+                                        <p:tgtEl>
+                                          <p:spTgt spid="17"/>
+                                        </p:tgtEl>
+                                        <p:attrNameLst>
+                                          <p:attrName>r</p:attrName>
+                                        </p:attrNameLst>
+                                      </p:cBhvr>
+                                    </p:animRot>
+                                    <p:animRot by="-240000">
+                                      <p:cBhvr>
+                                        <p:cTn id="19" dur="400" fill="hold">
+                                          <p:stCondLst>
+                                            <p:cond delay="400"/>
+                                          </p:stCondLst>
+                                        </p:cTn>
+                                        <p:tgtEl>
+                                          <p:spTgt spid="17"/>
+                                        </p:tgtEl>
+                                        <p:attrNameLst>
+                                          <p:attrName>r</p:attrName>
+                                        </p:attrNameLst>
+                                      </p:cBhvr>
+                                    </p:animRot>
+                                    <p:animRot by="240000">
+                                      <p:cBhvr>
+                                        <p:cTn id="20" dur="400" fill="hold">
+                                          <p:stCondLst>
+                                            <p:cond delay="800"/>
+                                          </p:stCondLst>
+                                        </p:cTn>
+                                        <p:tgtEl>
+                                          <p:spTgt spid="17"/>
+                                        </p:tgtEl>
+                                        <p:attrNameLst>
+                                          <p:attrName>r</p:attrName>
+                                        </p:attrNameLst>
+                                      </p:cBhvr>
+                                    </p:animRot>
+                                    <p:animRot by="-240000">
+                                      <p:cBhvr>
+                                        <p:cTn id="21" dur="400" fill="hold">
+                                          <p:stCondLst>
+                                            <p:cond delay="1200"/>
+                                          </p:stCondLst>
+                                        </p:cTn>
+                                        <p:tgtEl>
+                                          <p:spTgt spid="17"/>
+                                        </p:tgtEl>
+                                        <p:attrNameLst>
+                                          <p:attrName>r</p:attrName>
+                                        </p:attrNameLst>
+                                      </p:cBhvr>
+                                    </p:animRot>
+                                    <p:animRot by="120000">
+                                      <p:cBhvr>
+                                        <p:cTn id="22" dur="400" fill="hold">
+                                          <p:stCondLst>
+                                            <p:cond delay="1600"/>
+                                          </p:stCondLst>
+                                        </p:cTn>
+                                        <p:tgtEl>
+                                          <p:spTgt spid="17"/>
+                                        </p:tgtEl>
+                                        <p:attrNameLst>
+                                          <p:attrName>r</p:attrName>
+                                        </p:attrNameLst>
+                                      </p:cBhvr>
+                                    </p:animRot>
+                                  </p:childTnLst>
+                                </p:cTn>
+                              </p:par>
+                              <p:par>
+                                <p:cTn id="23" presetID="26" presetClass="emph" presetSubtype="0" repeatCount="indefinite" fill="hold" grpId="0" nodeType="withEffect">
+                                  <p:stCondLst>
+                                    <p:cond delay="0"/>
+                                  </p:stCondLst>
+                                  <p:childTnLst>
+                                    <p:animEffect transition="out" filter="fade">
+                                      <p:cBhvr>
+                                        <p:cTn id="24" dur="2000" tmFilter="0, 0; .2, .5; .8, .5; 1, 0"/>
+                                        <p:tgtEl>
+                                          <p:spTgt spid="13"/>
+                                        </p:tgtEl>
+                                      </p:cBhvr>
+                                    </p:animEffect>
+                                    <p:animScale>
+                                      <p:cBhvr>
+                                        <p:cTn id="25" dur="1000" autoRev="1" fill="hold"/>
+                                        <p:tgtEl>
+                                          <p:spTgt spid="13"/>
+                                        </p:tgtEl>
+                                      </p:cBhvr>
+                                      <p:by x="105000" y="105000"/>
+                                    </p:animScale>
+                                  </p:childTnLst>
+                                </p:cTn>
+                              </p:par>
+                            </p:childTnLst>
+                          </p:cTn>
+                        </p:par>
+                      </p:childTnLst>
+                    </p:cTn>
+                  </p:par>
+                </p:childTnLst>
+              </p:cTn>
+              <p:prevCondLst>
+                <p:cond evt="onPrev" delay="0">
+                  <p:tgtEl>
+                    <p:sldTgt/>
+                  </p:tgtEl>
+                </p:cond>
+              </p:prevCondLst>
+              <p:nextCondLst>
+                <p:cond evt="onNext" delay="0">
+                  <p:tgtEl>
+                    <p:sldTgt/>
+                  </p:tgtEl>
+                </p:cond>
+              </p:nextCondLst>
+            </p:seq>
+          </p:childTnLst>
+        </p:cTn>
+      </p:par>
+    </p:tnLst>
+    <p:bldLst>
+      <p:bldP spid="8" grpId="0" animBg="1"/>
+      <p:bldP spid="13" grpId="0" animBg="1"/>
+      <p:bldP spid="15" grpId="0" animBg="1"/>
+      <p:bldP spid="17" grpId="0" animBg="1"/>
+    </p:bldLst>
+  </p:timing>
 </p:sld>
 </file>
 
@@ -4067,6 +4930,593 @@
   <p:clrMapOvr>
     <a:masterClrMapping/>
   </p:clrMapOvr>
+  <p:timing>
+    <p:tnLst>
+      <p:par>
+        <p:cTn id="1" dur="indefinite" restart="never" nodeType="tmRoot">
+          <p:childTnLst>
+            <p:seq concurrent="1" nextAc="seek">
+              <p:cTn id="2" dur="indefinite" nodeType="mainSeq">
+                <p:childTnLst>
+                  <p:par>
+                    <p:cTn id="3" fill="hold">
+                      <p:stCondLst>
+                        <p:cond delay="indefinite"/>
+                        <p:cond evt="onBegin" delay="0">
+                          <p:tn val="2"/>
+                        </p:cond>
+                      </p:stCondLst>
+                      <p:childTnLst>
+                        <p:par>
+                          <p:cTn id="4" fill="hold">
+                            <p:stCondLst>
+                              <p:cond delay="0"/>
+                            </p:stCondLst>
+                            <p:childTnLst>
+                              <p:par>
+                                <p:cTn id="5" presetID="26" presetClass="emph" presetSubtype="0" repeatCount="indefinite" fill="hold" grpId="0" nodeType="withEffect">
+                                  <p:stCondLst>
+                                    <p:cond delay="0"/>
+                                  </p:stCondLst>
+                                  <p:childTnLst>
+                                    <p:animEffect transition="out" filter="fade">
+                                      <p:cBhvr>
+                                        <p:cTn id="6" dur="2000" tmFilter="0, 0; .2, .5; .8, .5; 1, 0"/>
+                                        <p:tgtEl>
+                                          <p:spTgt spid="5"/>
+                                        </p:tgtEl>
+                                      </p:cBhvr>
+                                    </p:animEffect>
+                                    <p:animScale>
+                                      <p:cBhvr>
+                                        <p:cTn id="7" dur="1000" autoRev="1" fill="hold"/>
+                                        <p:tgtEl>
+                                          <p:spTgt spid="5"/>
+                                        </p:tgtEl>
+                                      </p:cBhvr>
+                                      <p:by x="105000" y="105000"/>
+                                    </p:animScale>
+                                  </p:childTnLst>
+                                </p:cTn>
+                              </p:par>
+                              <p:par>
+                                <p:cTn id="8" presetID="16" presetClass="entr" presetSubtype="21" fill="hold" grpId="0" nodeType="withEffect">
+                                  <p:stCondLst>
+                                    <p:cond delay="0"/>
+                                  </p:stCondLst>
+                                  <p:childTnLst>
+                                    <p:set>
+                                      <p:cBhvr>
+                                        <p:cTn id="9" dur="1" fill="hold">
+                                          <p:stCondLst>
+                                            <p:cond delay="0"/>
+                                          </p:stCondLst>
+                                        </p:cTn>
+                                        <p:tgtEl>
+                                          <p:spTgt spid="2"/>
+                                        </p:tgtEl>
+                                        <p:attrNameLst>
+                                          <p:attrName>style.visibility</p:attrName>
+                                        </p:attrNameLst>
+                                      </p:cBhvr>
+                                      <p:to>
+                                        <p:strVal val="visible"/>
+                                      </p:to>
+                                    </p:set>
+                                    <p:animEffect transition="in" filter="barn(inVertical)">
+                                      <p:cBhvr>
+                                        <p:cTn id="10" dur="500"/>
+                                        <p:tgtEl>
+                                          <p:spTgt spid="2"/>
+                                        </p:tgtEl>
+                                      </p:cBhvr>
+                                    </p:animEffect>
+                                  </p:childTnLst>
+                                </p:cTn>
+                              </p:par>
+                            </p:childTnLst>
+                          </p:cTn>
+                        </p:par>
+                        <p:par>
+                          <p:cTn id="11" fill="hold">
+                            <p:stCondLst>
+                              <p:cond delay="2000"/>
+                            </p:stCondLst>
+                            <p:childTnLst>
+                              <p:par>
+                                <p:cTn id="12" presetID="2" presetClass="entr" presetSubtype="2" fill="hold" grpId="0" nodeType="afterEffect">
+                                  <p:stCondLst>
+                                    <p:cond delay="0"/>
+                                  </p:stCondLst>
+                                  <p:childTnLst>
+                                    <p:set>
+                                      <p:cBhvr>
+                                        <p:cTn id="13" dur="1" fill="hold">
+                                          <p:stCondLst>
+                                            <p:cond delay="0"/>
+                                          </p:stCondLst>
+                                        </p:cTn>
+                                        <p:tgtEl>
+                                          <p:spTgt spid="3">
+                                            <p:txEl>
+                                              <p:pRg st="0" end="0"/>
+                                            </p:txEl>
+                                          </p:spTgt>
+                                        </p:tgtEl>
+                                        <p:attrNameLst>
+                                          <p:attrName>style.visibility</p:attrName>
+                                        </p:attrNameLst>
+                                      </p:cBhvr>
+                                      <p:to>
+                                        <p:strVal val="visible"/>
+                                      </p:to>
+                                    </p:set>
+                                    <p:anim calcmode="lin" valueType="num">
+                                      <p:cBhvr additive="base">
+                                        <p:cTn id="14" dur="500" fill="hold"/>
+                                        <p:tgtEl>
+                                          <p:spTgt spid="3">
+                                            <p:txEl>
+                                              <p:pRg st="0" end="0"/>
+                                            </p:txEl>
+                                          </p:spTgt>
+                                        </p:tgtEl>
+                                        <p:attrNameLst>
+                                          <p:attrName>ppt_x</p:attrName>
+                                        </p:attrNameLst>
+                                      </p:cBhvr>
+                                      <p:tavLst>
+                                        <p:tav tm="0">
+                                          <p:val>
+                                            <p:strVal val="1+#ppt_w/2"/>
+                                          </p:val>
+                                        </p:tav>
+                                        <p:tav tm="100000">
+                                          <p:val>
+                                            <p:strVal val="#ppt_x"/>
+                                          </p:val>
+                                        </p:tav>
+                                      </p:tavLst>
+                                    </p:anim>
+                                    <p:anim calcmode="lin" valueType="num">
+                                      <p:cBhvr additive="base">
+                                        <p:cTn id="15" dur="500" fill="hold"/>
+                                        <p:tgtEl>
+                                          <p:spTgt spid="3">
+                                            <p:txEl>
+                                              <p:pRg st="0" end="0"/>
+                                            </p:txEl>
+                                          </p:spTgt>
+                                        </p:tgtEl>
+                                        <p:attrNameLst>
+                                          <p:attrName>ppt_y</p:attrName>
+                                        </p:attrNameLst>
+                                      </p:cBhvr>
+                                      <p:tavLst>
+                                        <p:tav tm="0">
+                                          <p:val>
+                                            <p:strVal val="#ppt_y"/>
+                                          </p:val>
+                                        </p:tav>
+                                        <p:tav tm="100000">
+                                          <p:val>
+                                            <p:strVal val="#ppt_y"/>
+                                          </p:val>
+                                        </p:tav>
+                                      </p:tavLst>
+                                    </p:anim>
+                                  </p:childTnLst>
+                                </p:cTn>
+                              </p:par>
+                            </p:childTnLst>
+                          </p:cTn>
+                        </p:par>
+                        <p:par>
+                          <p:cTn id="16" fill="hold">
+                            <p:stCondLst>
+                              <p:cond delay="2500"/>
+                            </p:stCondLst>
+                            <p:childTnLst>
+                              <p:par>
+                                <p:cTn id="17" presetID="2" presetClass="entr" presetSubtype="2" fill="hold" grpId="0" nodeType="afterEffect">
+                                  <p:stCondLst>
+                                    <p:cond delay="0"/>
+                                  </p:stCondLst>
+                                  <p:childTnLst>
+                                    <p:set>
+                                      <p:cBhvr>
+                                        <p:cTn id="18" dur="1" fill="hold">
+                                          <p:stCondLst>
+                                            <p:cond delay="0"/>
+                                          </p:stCondLst>
+                                        </p:cTn>
+                                        <p:tgtEl>
+                                          <p:spTgt spid="3">
+                                            <p:txEl>
+                                              <p:pRg st="1" end="1"/>
+                                            </p:txEl>
+                                          </p:spTgt>
+                                        </p:tgtEl>
+                                        <p:attrNameLst>
+                                          <p:attrName>style.visibility</p:attrName>
+                                        </p:attrNameLst>
+                                      </p:cBhvr>
+                                      <p:to>
+                                        <p:strVal val="visible"/>
+                                      </p:to>
+                                    </p:set>
+                                    <p:anim calcmode="lin" valueType="num">
+                                      <p:cBhvr additive="base">
+                                        <p:cTn id="19" dur="500" fill="hold"/>
+                                        <p:tgtEl>
+                                          <p:spTgt spid="3">
+                                            <p:txEl>
+                                              <p:pRg st="1" end="1"/>
+                                            </p:txEl>
+                                          </p:spTgt>
+                                        </p:tgtEl>
+                                        <p:attrNameLst>
+                                          <p:attrName>ppt_x</p:attrName>
+                                        </p:attrNameLst>
+                                      </p:cBhvr>
+                                      <p:tavLst>
+                                        <p:tav tm="0">
+                                          <p:val>
+                                            <p:strVal val="1+#ppt_w/2"/>
+                                          </p:val>
+                                        </p:tav>
+                                        <p:tav tm="100000">
+                                          <p:val>
+                                            <p:strVal val="#ppt_x"/>
+                                          </p:val>
+                                        </p:tav>
+                                      </p:tavLst>
+                                    </p:anim>
+                                    <p:anim calcmode="lin" valueType="num">
+                                      <p:cBhvr additive="base">
+                                        <p:cTn id="20" dur="500" fill="hold"/>
+                                        <p:tgtEl>
+                                          <p:spTgt spid="3">
+                                            <p:txEl>
+                                              <p:pRg st="1" end="1"/>
+                                            </p:txEl>
+                                          </p:spTgt>
+                                        </p:tgtEl>
+                                        <p:attrNameLst>
+                                          <p:attrName>ppt_y</p:attrName>
+                                        </p:attrNameLst>
+                                      </p:cBhvr>
+                                      <p:tavLst>
+                                        <p:tav tm="0">
+                                          <p:val>
+                                            <p:strVal val="#ppt_y"/>
+                                          </p:val>
+                                        </p:tav>
+                                        <p:tav tm="100000">
+                                          <p:val>
+                                            <p:strVal val="#ppt_y"/>
+                                          </p:val>
+                                        </p:tav>
+                                      </p:tavLst>
+                                    </p:anim>
+                                  </p:childTnLst>
+                                </p:cTn>
+                              </p:par>
+                            </p:childTnLst>
+                          </p:cTn>
+                        </p:par>
+                        <p:par>
+                          <p:cTn id="21" fill="hold">
+                            <p:stCondLst>
+                              <p:cond delay="3000"/>
+                            </p:stCondLst>
+                            <p:childTnLst>
+                              <p:par>
+                                <p:cTn id="22" presetID="2" presetClass="entr" presetSubtype="2" fill="hold" grpId="0" nodeType="afterEffect">
+                                  <p:stCondLst>
+                                    <p:cond delay="0"/>
+                                  </p:stCondLst>
+                                  <p:childTnLst>
+                                    <p:set>
+                                      <p:cBhvr>
+                                        <p:cTn id="23" dur="1" fill="hold">
+                                          <p:stCondLst>
+                                            <p:cond delay="0"/>
+                                          </p:stCondLst>
+                                        </p:cTn>
+                                        <p:tgtEl>
+                                          <p:spTgt spid="3">
+                                            <p:txEl>
+                                              <p:pRg st="2" end="2"/>
+                                            </p:txEl>
+                                          </p:spTgt>
+                                        </p:tgtEl>
+                                        <p:attrNameLst>
+                                          <p:attrName>style.visibility</p:attrName>
+                                        </p:attrNameLst>
+                                      </p:cBhvr>
+                                      <p:to>
+                                        <p:strVal val="visible"/>
+                                      </p:to>
+                                    </p:set>
+                                    <p:anim calcmode="lin" valueType="num">
+                                      <p:cBhvr additive="base">
+                                        <p:cTn id="24" dur="500" fill="hold"/>
+                                        <p:tgtEl>
+                                          <p:spTgt spid="3">
+                                            <p:txEl>
+                                              <p:pRg st="2" end="2"/>
+                                            </p:txEl>
+                                          </p:spTgt>
+                                        </p:tgtEl>
+                                        <p:attrNameLst>
+                                          <p:attrName>ppt_x</p:attrName>
+                                        </p:attrNameLst>
+                                      </p:cBhvr>
+                                      <p:tavLst>
+                                        <p:tav tm="0">
+                                          <p:val>
+                                            <p:strVal val="1+#ppt_w/2"/>
+                                          </p:val>
+                                        </p:tav>
+                                        <p:tav tm="100000">
+                                          <p:val>
+                                            <p:strVal val="#ppt_x"/>
+                                          </p:val>
+                                        </p:tav>
+                                      </p:tavLst>
+                                    </p:anim>
+                                    <p:anim calcmode="lin" valueType="num">
+                                      <p:cBhvr additive="base">
+                                        <p:cTn id="25" dur="500" fill="hold"/>
+                                        <p:tgtEl>
+                                          <p:spTgt spid="3">
+                                            <p:txEl>
+                                              <p:pRg st="2" end="2"/>
+                                            </p:txEl>
+                                          </p:spTgt>
+                                        </p:tgtEl>
+                                        <p:attrNameLst>
+                                          <p:attrName>ppt_y</p:attrName>
+                                        </p:attrNameLst>
+                                      </p:cBhvr>
+                                      <p:tavLst>
+                                        <p:tav tm="0">
+                                          <p:val>
+                                            <p:strVal val="#ppt_y"/>
+                                          </p:val>
+                                        </p:tav>
+                                        <p:tav tm="100000">
+                                          <p:val>
+                                            <p:strVal val="#ppt_y"/>
+                                          </p:val>
+                                        </p:tav>
+                                      </p:tavLst>
+                                    </p:anim>
+                                  </p:childTnLst>
+                                </p:cTn>
+                              </p:par>
+                            </p:childTnLst>
+                          </p:cTn>
+                        </p:par>
+                        <p:par>
+                          <p:cTn id="26" fill="hold">
+                            <p:stCondLst>
+                              <p:cond delay="3500"/>
+                            </p:stCondLst>
+                            <p:childTnLst>
+                              <p:par>
+                                <p:cTn id="27" presetID="2" presetClass="entr" presetSubtype="2" fill="hold" grpId="0" nodeType="afterEffect">
+                                  <p:stCondLst>
+                                    <p:cond delay="0"/>
+                                  </p:stCondLst>
+                                  <p:childTnLst>
+                                    <p:set>
+                                      <p:cBhvr>
+                                        <p:cTn id="28" dur="1" fill="hold">
+                                          <p:stCondLst>
+                                            <p:cond delay="0"/>
+                                          </p:stCondLst>
+                                        </p:cTn>
+                                        <p:tgtEl>
+                                          <p:spTgt spid="3">
+                                            <p:txEl>
+                                              <p:pRg st="3" end="3"/>
+                                            </p:txEl>
+                                          </p:spTgt>
+                                        </p:tgtEl>
+                                        <p:attrNameLst>
+                                          <p:attrName>style.visibility</p:attrName>
+                                        </p:attrNameLst>
+                                      </p:cBhvr>
+                                      <p:to>
+                                        <p:strVal val="visible"/>
+                                      </p:to>
+                                    </p:set>
+                                    <p:anim calcmode="lin" valueType="num">
+                                      <p:cBhvr additive="base">
+                                        <p:cTn id="29" dur="500" fill="hold"/>
+                                        <p:tgtEl>
+                                          <p:spTgt spid="3">
+                                            <p:txEl>
+                                              <p:pRg st="3" end="3"/>
+                                            </p:txEl>
+                                          </p:spTgt>
+                                        </p:tgtEl>
+                                        <p:attrNameLst>
+                                          <p:attrName>ppt_x</p:attrName>
+                                        </p:attrNameLst>
+                                      </p:cBhvr>
+                                      <p:tavLst>
+                                        <p:tav tm="0">
+                                          <p:val>
+                                            <p:strVal val="1+#ppt_w/2"/>
+                                          </p:val>
+                                        </p:tav>
+                                        <p:tav tm="100000">
+                                          <p:val>
+                                            <p:strVal val="#ppt_x"/>
+                                          </p:val>
+                                        </p:tav>
+                                      </p:tavLst>
+                                    </p:anim>
+                                    <p:anim calcmode="lin" valueType="num">
+                                      <p:cBhvr additive="base">
+                                        <p:cTn id="30" dur="500" fill="hold"/>
+                                        <p:tgtEl>
+                                          <p:spTgt spid="3">
+                                            <p:txEl>
+                                              <p:pRg st="3" end="3"/>
+                                            </p:txEl>
+                                          </p:spTgt>
+                                        </p:tgtEl>
+                                        <p:attrNameLst>
+                                          <p:attrName>ppt_y</p:attrName>
+                                        </p:attrNameLst>
+                                      </p:cBhvr>
+                                      <p:tavLst>
+                                        <p:tav tm="0">
+                                          <p:val>
+                                            <p:strVal val="#ppt_y"/>
+                                          </p:val>
+                                        </p:tav>
+                                        <p:tav tm="100000">
+                                          <p:val>
+                                            <p:strVal val="#ppt_y"/>
+                                          </p:val>
+                                        </p:tav>
+                                      </p:tavLst>
+                                    </p:anim>
+                                  </p:childTnLst>
+                                </p:cTn>
+                              </p:par>
+                            </p:childTnLst>
+                          </p:cTn>
+                        </p:par>
+                        <p:par>
+                          <p:cTn id="31" fill="hold">
+                            <p:stCondLst>
+                              <p:cond delay="4000"/>
+                            </p:stCondLst>
+                            <p:childTnLst>
+                              <p:par>
+                                <p:cTn id="32" presetID="2" presetClass="entr" presetSubtype="2" fill="hold" grpId="0" nodeType="afterEffect">
+                                  <p:stCondLst>
+                                    <p:cond delay="0"/>
+                                  </p:stCondLst>
+                                  <p:childTnLst>
+                                    <p:set>
+                                      <p:cBhvr>
+                                        <p:cTn id="33" dur="1" fill="hold">
+                                          <p:stCondLst>
+                                            <p:cond delay="0"/>
+                                          </p:stCondLst>
+                                        </p:cTn>
+                                        <p:tgtEl>
+                                          <p:spTgt spid="3">
+                                            <p:txEl>
+                                              <p:pRg st="4" end="4"/>
+                                            </p:txEl>
+                                          </p:spTgt>
+                                        </p:tgtEl>
+                                        <p:attrNameLst>
+                                          <p:attrName>style.visibility</p:attrName>
+                                        </p:attrNameLst>
+                                      </p:cBhvr>
+                                      <p:to>
+                                        <p:strVal val="visible"/>
+                                      </p:to>
+                                    </p:set>
+                                    <p:anim calcmode="lin" valueType="num">
+                                      <p:cBhvr additive="base">
+                                        <p:cTn id="34" dur="500" fill="hold"/>
+                                        <p:tgtEl>
+                                          <p:spTgt spid="3">
+                                            <p:txEl>
+                                              <p:pRg st="4" end="4"/>
+                                            </p:txEl>
+                                          </p:spTgt>
+                                        </p:tgtEl>
+                                        <p:attrNameLst>
+                                          <p:attrName>ppt_x</p:attrName>
+                                        </p:attrNameLst>
+                                      </p:cBhvr>
+                                      <p:tavLst>
+                                        <p:tav tm="0">
+                                          <p:val>
+                                            <p:strVal val="1+#ppt_w/2"/>
+                                          </p:val>
+                                        </p:tav>
+                                        <p:tav tm="100000">
+                                          <p:val>
+                                            <p:strVal val="#ppt_x"/>
+                                          </p:val>
+                                        </p:tav>
+                                      </p:tavLst>
+                                    </p:anim>
+                                    <p:anim calcmode="lin" valueType="num">
+                                      <p:cBhvr additive="base">
+                                        <p:cTn id="35" dur="500" fill="hold"/>
+                                        <p:tgtEl>
+                                          <p:spTgt spid="3">
+                                            <p:txEl>
+                                              <p:pRg st="4" end="4"/>
+                                            </p:txEl>
+                                          </p:spTgt>
+                                        </p:tgtEl>
+                                        <p:attrNameLst>
+                                          <p:attrName>ppt_y</p:attrName>
+                                        </p:attrNameLst>
+                                      </p:cBhvr>
+                                      <p:tavLst>
+                                        <p:tav tm="0">
+                                          <p:val>
+                                            <p:strVal val="#ppt_y"/>
+                                          </p:val>
+                                        </p:tav>
+                                        <p:tav tm="100000">
+                                          <p:val>
+                                            <p:strVal val="#ppt_y"/>
+                                          </p:val>
+                                        </p:tav>
+                                      </p:tavLst>
+                                    </p:anim>
+                                  </p:childTnLst>
+                                </p:cTn>
+                              </p:par>
+                            </p:childTnLst>
+                          </p:cTn>
+                        </p:par>
+                      </p:childTnLst>
+                    </p:cTn>
+                  </p:par>
+                </p:childTnLst>
+              </p:cTn>
+              <p:prevCondLst>
+                <p:cond evt="onPrev" delay="0">
+                  <p:tgtEl>
+                    <p:sldTgt/>
+                  </p:tgtEl>
+                </p:cond>
+              </p:prevCondLst>
+              <p:nextCondLst>
+                <p:cond evt="onNext" delay="0">
+                  <p:tgtEl>
+                    <p:sldTgt/>
+                  </p:tgtEl>
+                </p:cond>
+              </p:nextCondLst>
+            </p:seq>
+          </p:childTnLst>
+        </p:cTn>
+      </p:par>
+    </p:tnLst>
+    <p:bldLst>
+      <p:bldP spid="2" grpId="0"/>
+      <p:bldP spid="3" grpId="0" build="p"/>
+      <p:bldP spid="5" grpId="0" animBg="1"/>
+    </p:bldLst>
+  </p:timing>
 </p:sld>
 </file>
 
@@ -4410,6 +5860,458 @@
   <p:clrMapOvr>
     <a:masterClrMapping/>
   </p:clrMapOvr>
+  <p:timing>
+    <p:tnLst>
+      <p:par>
+        <p:cTn id="1" dur="indefinite" restart="never" nodeType="tmRoot">
+          <p:childTnLst>
+            <p:seq concurrent="1" nextAc="seek">
+              <p:cTn id="2" dur="indefinite" nodeType="mainSeq">
+                <p:childTnLst>
+                  <p:par>
+                    <p:cTn id="3" fill="hold">
+                      <p:stCondLst>
+                        <p:cond delay="indefinite"/>
+                        <p:cond evt="onBegin" delay="0">
+                          <p:tn val="2"/>
+                        </p:cond>
+                      </p:stCondLst>
+                      <p:childTnLst>
+                        <p:par>
+                          <p:cTn id="4" fill="hold">
+                            <p:stCondLst>
+                              <p:cond delay="0"/>
+                            </p:stCondLst>
+                            <p:childTnLst>
+                              <p:par>
+                                <p:cTn id="5" presetID="26" presetClass="emph" presetSubtype="0" repeatCount="indefinite" fill="hold" grpId="0" nodeType="withEffect">
+                                  <p:stCondLst>
+                                    <p:cond delay="0"/>
+                                  </p:stCondLst>
+                                  <p:childTnLst>
+                                    <p:animEffect transition="out" filter="fade">
+                                      <p:cBhvr>
+                                        <p:cTn id="6" dur="2000" tmFilter="0, 0; .2, .5; .8, .5; 1, 0"/>
+                                        <p:tgtEl>
+                                          <p:spTgt spid="8"/>
+                                        </p:tgtEl>
+                                      </p:cBhvr>
+                                    </p:animEffect>
+                                    <p:animScale>
+                                      <p:cBhvr>
+                                        <p:cTn id="7" dur="1000" autoRev="1" fill="hold"/>
+                                        <p:tgtEl>
+                                          <p:spTgt spid="8"/>
+                                        </p:tgtEl>
+                                      </p:cBhvr>
+                                      <p:by x="105000" y="105000"/>
+                                    </p:animScale>
+                                  </p:childTnLst>
+                                </p:cTn>
+                              </p:par>
+                              <p:par>
+                                <p:cTn id="8" presetID="16" presetClass="entr" presetSubtype="21" fill="hold" grpId="0" nodeType="withEffect">
+                                  <p:stCondLst>
+                                    <p:cond delay="0"/>
+                                  </p:stCondLst>
+                                  <p:childTnLst>
+                                    <p:set>
+                                      <p:cBhvr>
+                                        <p:cTn id="9" dur="1" fill="hold">
+                                          <p:stCondLst>
+                                            <p:cond delay="0"/>
+                                          </p:stCondLst>
+                                        </p:cTn>
+                                        <p:tgtEl>
+                                          <p:spTgt spid="2"/>
+                                        </p:tgtEl>
+                                        <p:attrNameLst>
+                                          <p:attrName>style.visibility</p:attrName>
+                                        </p:attrNameLst>
+                                      </p:cBhvr>
+                                      <p:to>
+                                        <p:strVal val="visible"/>
+                                      </p:to>
+                                    </p:set>
+                                    <p:animEffect transition="in" filter="barn(inVertical)">
+                                      <p:cBhvr>
+                                        <p:cTn id="10" dur="500"/>
+                                        <p:tgtEl>
+                                          <p:spTgt spid="2"/>
+                                        </p:tgtEl>
+                                      </p:cBhvr>
+                                    </p:animEffect>
+                                  </p:childTnLst>
+                                </p:cTn>
+                              </p:par>
+                            </p:childTnLst>
+                          </p:cTn>
+                        </p:par>
+                        <p:par>
+                          <p:cTn id="11" fill="hold">
+                            <p:stCondLst>
+                              <p:cond delay="2000"/>
+                            </p:stCondLst>
+                            <p:childTnLst>
+                              <p:par>
+                                <p:cTn id="12" presetID="2" presetClass="entr" presetSubtype="4" fill="hold" grpId="0" nodeType="afterEffect">
+                                  <p:stCondLst>
+                                    <p:cond delay="0"/>
+                                  </p:stCondLst>
+                                  <p:childTnLst>
+                                    <p:set>
+                                      <p:cBhvr>
+                                        <p:cTn id="13" dur="1" fill="hold">
+                                          <p:stCondLst>
+                                            <p:cond delay="0"/>
+                                          </p:stCondLst>
+                                        </p:cTn>
+                                        <p:tgtEl>
+                                          <p:spTgt spid="3">
+                                            <p:txEl>
+                                              <p:pRg st="0" end="0"/>
+                                            </p:txEl>
+                                          </p:spTgt>
+                                        </p:tgtEl>
+                                        <p:attrNameLst>
+                                          <p:attrName>style.visibility</p:attrName>
+                                        </p:attrNameLst>
+                                      </p:cBhvr>
+                                      <p:to>
+                                        <p:strVal val="visible"/>
+                                      </p:to>
+                                    </p:set>
+                                    <p:anim calcmode="lin" valueType="num">
+                                      <p:cBhvr additive="base">
+                                        <p:cTn id="14" dur="500" fill="hold"/>
+                                        <p:tgtEl>
+                                          <p:spTgt spid="3">
+                                            <p:txEl>
+                                              <p:pRg st="0" end="0"/>
+                                            </p:txEl>
+                                          </p:spTgt>
+                                        </p:tgtEl>
+                                        <p:attrNameLst>
+                                          <p:attrName>ppt_x</p:attrName>
+                                        </p:attrNameLst>
+                                      </p:cBhvr>
+                                      <p:tavLst>
+                                        <p:tav tm="0">
+                                          <p:val>
+                                            <p:strVal val="#ppt_x"/>
+                                          </p:val>
+                                        </p:tav>
+                                        <p:tav tm="100000">
+                                          <p:val>
+                                            <p:strVal val="#ppt_x"/>
+                                          </p:val>
+                                        </p:tav>
+                                      </p:tavLst>
+                                    </p:anim>
+                                    <p:anim calcmode="lin" valueType="num">
+                                      <p:cBhvr additive="base">
+                                        <p:cTn id="15" dur="500" fill="hold"/>
+                                        <p:tgtEl>
+                                          <p:spTgt spid="3">
+                                            <p:txEl>
+                                              <p:pRg st="0" end="0"/>
+                                            </p:txEl>
+                                          </p:spTgt>
+                                        </p:tgtEl>
+                                        <p:attrNameLst>
+                                          <p:attrName>ppt_y</p:attrName>
+                                        </p:attrNameLst>
+                                      </p:cBhvr>
+                                      <p:tavLst>
+                                        <p:tav tm="0">
+                                          <p:val>
+                                            <p:strVal val="1+#ppt_h/2"/>
+                                          </p:val>
+                                        </p:tav>
+                                        <p:tav tm="100000">
+                                          <p:val>
+                                            <p:strVal val="#ppt_y"/>
+                                          </p:val>
+                                        </p:tav>
+                                      </p:tavLst>
+                                    </p:anim>
+                                  </p:childTnLst>
+                                </p:cTn>
+                              </p:par>
+                              <p:par>
+                                <p:cTn id="16" presetID="2" presetClass="entr" presetSubtype="4" fill="hold" nodeType="withEffect">
+                                  <p:stCondLst>
+                                    <p:cond delay="0"/>
+                                  </p:stCondLst>
+                                  <p:childTnLst>
+                                    <p:set>
+                                      <p:cBhvr>
+                                        <p:cTn id="17" dur="1" fill="hold">
+                                          <p:stCondLst>
+                                            <p:cond delay="0"/>
+                                          </p:stCondLst>
+                                        </p:cTn>
+                                        <p:tgtEl>
+                                          <p:spTgt spid="5"/>
+                                        </p:tgtEl>
+                                        <p:attrNameLst>
+                                          <p:attrName>style.visibility</p:attrName>
+                                        </p:attrNameLst>
+                                      </p:cBhvr>
+                                      <p:to>
+                                        <p:strVal val="visible"/>
+                                      </p:to>
+                                    </p:set>
+                                    <p:anim calcmode="lin" valueType="num">
+                                      <p:cBhvr additive="base">
+                                        <p:cTn id="18" dur="500" fill="hold"/>
+                                        <p:tgtEl>
+                                          <p:spTgt spid="5"/>
+                                        </p:tgtEl>
+                                        <p:attrNameLst>
+                                          <p:attrName>ppt_x</p:attrName>
+                                        </p:attrNameLst>
+                                      </p:cBhvr>
+                                      <p:tavLst>
+                                        <p:tav tm="0">
+                                          <p:val>
+                                            <p:strVal val="#ppt_x"/>
+                                          </p:val>
+                                        </p:tav>
+                                        <p:tav tm="100000">
+                                          <p:val>
+                                            <p:strVal val="#ppt_x"/>
+                                          </p:val>
+                                        </p:tav>
+                                      </p:tavLst>
+                                    </p:anim>
+                                    <p:anim calcmode="lin" valueType="num">
+                                      <p:cBhvr additive="base">
+                                        <p:cTn id="19" dur="500" fill="hold"/>
+                                        <p:tgtEl>
+                                          <p:spTgt spid="5"/>
+                                        </p:tgtEl>
+                                        <p:attrNameLst>
+                                          <p:attrName>ppt_y</p:attrName>
+                                        </p:attrNameLst>
+                                      </p:cBhvr>
+                                      <p:tavLst>
+                                        <p:tav tm="0">
+                                          <p:val>
+                                            <p:strVal val="1+#ppt_h/2"/>
+                                          </p:val>
+                                        </p:tav>
+                                        <p:tav tm="100000">
+                                          <p:val>
+                                            <p:strVal val="#ppt_y"/>
+                                          </p:val>
+                                        </p:tav>
+                                      </p:tavLst>
+                                    </p:anim>
+                                  </p:childTnLst>
+                                </p:cTn>
+                              </p:par>
+                            </p:childTnLst>
+                          </p:cTn>
+                        </p:par>
+                        <p:par>
+                          <p:cTn id="20" fill="hold">
+                            <p:stCondLst>
+                              <p:cond delay="2500"/>
+                            </p:stCondLst>
+                            <p:childTnLst>
+                              <p:par>
+                                <p:cTn id="21" presetID="2" presetClass="entr" presetSubtype="4" fill="hold" grpId="0" nodeType="afterEffect">
+                                  <p:stCondLst>
+                                    <p:cond delay="0"/>
+                                  </p:stCondLst>
+                                  <p:childTnLst>
+                                    <p:set>
+                                      <p:cBhvr>
+                                        <p:cTn id="22" dur="1" fill="hold">
+                                          <p:stCondLst>
+                                            <p:cond delay="0"/>
+                                          </p:stCondLst>
+                                        </p:cTn>
+                                        <p:tgtEl>
+                                          <p:spTgt spid="4">
+                                            <p:txEl>
+                                              <p:pRg st="0" end="0"/>
+                                            </p:txEl>
+                                          </p:spTgt>
+                                        </p:tgtEl>
+                                        <p:attrNameLst>
+                                          <p:attrName>style.visibility</p:attrName>
+                                        </p:attrNameLst>
+                                      </p:cBhvr>
+                                      <p:to>
+                                        <p:strVal val="visible"/>
+                                      </p:to>
+                                    </p:set>
+                                    <p:anim calcmode="lin" valueType="num">
+                                      <p:cBhvr additive="base">
+                                        <p:cTn id="23" dur="500" fill="hold"/>
+                                        <p:tgtEl>
+                                          <p:spTgt spid="4">
+                                            <p:txEl>
+                                              <p:pRg st="0" end="0"/>
+                                            </p:txEl>
+                                          </p:spTgt>
+                                        </p:tgtEl>
+                                        <p:attrNameLst>
+                                          <p:attrName>ppt_x</p:attrName>
+                                        </p:attrNameLst>
+                                      </p:cBhvr>
+                                      <p:tavLst>
+                                        <p:tav tm="0">
+                                          <p:val>
+                                            <p:strVal val="#ppt_x"/>
+                                          </p:val>
+                                        </p:tav>
+                                        <p:tav tm="100000">
+                                          <p:val>
+                                            <p:strVal val="#ppt_x"/>
+                                          </p:val>
+                                        </p:tav>
+                                      </p:tavLst>
+                                    </p:anim>
+                                    <p:anim calcmode="lin" valueType="num">
+                                      <p:cBhvr additive="base">
+                                        <p:cTn id="24" dur="500" fill="hold"/>
+                                        <p:tgtEl>
+                                          <p:spTgt spid="4">
+                                            <p:txEl>
+                                              <p:pRg st="0" end="0"/>
+                                            </p:txEl>
+                                          </p:spTgt>
+                                        </p:tgtEl>
+                                        <p:attrNameLst>
+                                          <p:attrName>ppt_y</p:attrName>
+                                        </p:attrNameLst>
+                                      </p:cBhvr>
+                                      <p:tavLst>
+                                        <p:tav tm="0">
+                                          <p:val>
+                                            <p:strVal val="1+#ppt_h/2"/>
+                                          </p:val>
+                                        </p:tav>
+                                        <p:tav tm="100000">
+                                          <p:val>
+                                            <p:strVal val="#ppt_y"/>
+                                          </p:val>
+                                        </p:tav>
+                                      </p:tavLst>
+                                    </p:anim>
+                                  </p:childTnLst>
+                                </p:cTn>
+                              </p:par>
+                              <p:par>
+                                <p:cTn id="25" presetID="2" presetClass="entr" presetSubtype="4" fill="hold" nodeType="withEffect">
+                                  <p:stCondLst>
+                                    <p:cond delay="0"/>
+                                  </p:stCondLst>
+                                  <p:childTnLst>
+                                    <p:set>
+                                      <p:cBhvr>
+                                        <p:cTn id="26" dur="1" fill="hold">
+                                          <p:stCondLst>
+                                            <p:cond delay="0"/>
+                                          </p:stCondLst>
+                                        </p:cTn>
+                                        <p:tgtEl>
+                                          <p:spTgt spid="6"/>
+                                        </p:tgtEl>
+                                        <p:attrNameLst>
+                                          <p:attrName>style.visibility</p:attrName>
+                                        </p:attrNameLst>
+                                      </p:cBhvr>
+                                      <p:to>
+                                        <p:strVal val="visible"/>
+                                      </p:to>
+                                    </p:set>
+                                    <p:anim calcmode="lin" valueType="num">
+                                      <p:cBhvr additive="base">
+                                        <p:cTn id="27" dur="500" fill="hold"/>
+                                        <p:tgtEl>
+                                          <p:spTgt spid="6"/>
+                                        </p:tgtEl>
+                                        <p:attrNameLst>
+                                          <p:attrName>ppt_x</p:attrName>
+                                        </p:attrNameLst>
+                                      </p:cBhvr>
+                                      <p:tavLst>
+                                        <p:tav tm="0">
+                                          <p:val>
+                                            <p:strVal val="#ppt_x"/>
+                                          </p:val>
+                                        </p:tav>
+                                        <p:tav tm="100000">
+                                          <p:val>
+                                            <p:strVal val="#ppt_x"/>
+                                          </p:val>
+                                        </p:tav>
+                                      </p:tavLst>
+                                    </p:anim>
+                                    <p:anim calcmode="lin" valueType="num">
+                                      <p:cBhvr additive="base">
+                                        <p:cTn id="28" dur="500" fill="hold"/>
+                                        <p:tgtEl>
+                                          <p:spTgt spid="6"/>
+                                        </p:tgtEl>
+                                        <p:attrNameLst>
+                                          <p:attrName>ppt_y</p:attrName>
+                                        </p:attrNameLst>
+                                      </p:cBhvr>
+                                      <p:tavLst>
+                                        <p:tav tm="0">
+                                          <p:val>
+                                            <p:strVal val="1+#ppt_h/2"/>
+                                          </p:val>
+                                        </p:tav>
+                                        <p:tav tm="100000">
+                                          <p:val>
+                                            <p:strVal val="#ppt_y"/>
+                                          </p:val>
+                                        </p:tav>
+                                      </p:tavLst>
+                                    </p:anim>
+                                  </p:childTnLst>
+                                </p:cTn>
+                              </p:par>
+                            </p:childTnLst>
+                          </p:cTn>
+                        </p:par>
+                      </p:childTnLst>
+                    </p:cTn>
+                  </p:par>
+                </p:childTnLst>
+              </p:cTn>
+              <p:prevCondLst>
+                <p:cond evt="onPrev" delay="0">
+                  <p:tgtEl>
+                    <p:sldTgt/>
+                  </p:tgtEl>
+                </p:cond>
+              </p:prevCondLst>
+              <p:nextCondLst>
+                <p:cond evt="onNext" delay="0">
+                  <p:tgtEl>
+                    <p:sldTgt/>
+                  </p:tgtEl>
+                </p:cond>
+              </p:nextCondLst>
+            </p:seq>
+          </p:childTnLst>
+        </p:cTn>
+      </p:par>
+    </p:tnLst>
+    <p:bldLst>
+      <p:bldP spid="2" grpId="0"/>
+      <p:bldP spid="3" grpId="0" build="p"/>
+      <p:bldP spid="4" grpId="0" build="p"/>
+      <p:bldP spid="8" grpId="0" animBg="1"/>
+    </p:bldLst>
+  </p:timing>
 </p:sld>
 </file>
 
@@ -4636,81 +6538,68 @@
           </a:p>
         </p:txBody>
       </p:sp>
-      <p:sp>
-        <p:nvSpPr>
-          <p:cNvPr id="10" name="Nyíl: balra mutató 9">
-            <a:hlinkClick r:id="" action="ppaction://hlinkshowjump?jump=nextslide"/>
-            <a:extLst>
-              <a:ext uri="{FF2B5EF4-FFF2-40B4-BE49-F238E27FC236}">
-                <a16:creationId xmlns:a16="http://schemas.microsoft.com/office/drawing/2014/main" id="{F0BC8774-D6F2-F269-64CA-F1612FAC9FE8}"/>
-              </a:ext>
-            </a:extLst>
-          </p:cNvPr>
-          <p:cNvSpPr/>
+      <p:pic>
+        <p:nvPicPr>
+          <p:cNvPr id="6" name="Kép 5" descr="1 number 1 - free Icon PNG, SVG">
+            <a:hlinkClick r:id="rId4" action="ppaction://hlinksldjump"/>
+            <a:extLst>
+              <a:ext uri="{FF2B5EF4-FFF2-40B4-BE49-F238E27FC236}">
+                <a16:creationId xmlns:a16="http://schemas.microsoft.com/office/drawing/2014/main" id="{630B0114-B0EB-461D-184E-3F9D47408039}"/>
+              </a:ext>
+            </a:extLst>
+          </p:cNvPr>
+          <p:cNvPicPr>
+            <a:picLocks noChangeAspect="1"/>
+          </p:cNvPicPr>
           <p:nvPr/>
-        </p:nvSpPr>
+        </p:nvPicPr>
+        <p:blipFill>
+          <a:blip r:embed="rId5"/>
+          <a:stretch>
+            <a:fillRect/>
+          </a:stretch>
+        </p:blipFill>
         <p:spPr>
-          <a:xfrm flipH="1">
-            <a:off x="7331124" y="5223872"/>
-            <a:ext cx="2875175" cy="1325563"/>
+          <a:xfrm>
+            <a:off x="6095999" y="5223872"/>
+            <a:ext cx="1325563" cy="1325563"/>
           </a:xfrm>
-          <a:prstGeom prst="leftArrow">
+          <a:prstGeom prst="rect">
             <a:avLst/>
           </a:prstGeom>
-          <a:solidFill>
-            <a:schemeClr val="bg1"/>
-          </a:solidFill>
-          <a:ln w="63500">
-            <a:gradFill>
-              <a:gsLst>
-                <a:gs pos="0">
-                  <a:schemeClr val="accent4">
-                    <a:lumMod val="75000"/>
-                  </a:schemeClr>
-                </a:gs>
-                <a:gs pos="100000">
-                  <a:schemeClr val="accent2">
-                    <a:lumMod val="50000"/>
-                  </a:schemeClr>
-                </a:gs>
-              </a:gsLst>
-              <a:lin ang="5400000" scaled="1"/>
-            </a:gradFill>
-          </a:ln>
         </p:spPr>
-        <p:style>
-          <a:lnRef idx="2">
-            <a:schemeClr val="accent1">
-              <a:shade val="15000"/>
-            </a:schemeClr>
-          </a:lnRef>
-          <a:fillRef idx="1">
-            <a:schemeClr val="accent1"/>
-          </a:fillRef>
-          <a:effectRef idx="0">
-            <a:schemeClr val="accent1"/>
-          </a:effectRef>
-          <a:fontRef idx="minor">
-            <a:schemeClr val="lt1"/>
-          </a:fontRef>
-        </p:style>
-        <p:txBody>
-          <a:bodyPr vert="horz" rtlCol="0" anchor="ctr" anchorCtr="0"/>
-          <a:lstStyle/>
-          <a:p>
-            <a:pPr algn="ctr"/>
-            <a:r>
-              <a:rPr lang="hu-HU" sz="3200" dirty="0">
-                <a:solidFill>
-                  <a:schemeClr val="tx1"/>
-                </a:solidFill>
-                <a:latin typeface="Comic Sans MS" panose="030F0702030302020204" pitchFamily="66" charset="0"/>
-              </a:rPr>
-              <a:t>Tovább</a:t>
-            </a:r>
-          </a:p>
-        </p:txBody>
-      </p:sp>
+      </p:pic>
+      <p:pic>
+        <p:nvPicPr>
+          <p:cNvPr id="9" name="Kép 8" descr="2 number 2 - free Icon PNG, SVG">
+            <a:hlinkClick r:id="rId6" action="ppaction://hlinksldjump"/>
+            <a:extLst>
+              <a:ext uri="{FF2B5EF4-FFF2-40B4-BE49-F238E27FC236}">
+                <a16:creationId xmlns:a16="http://schemas.microsoft.com/office/drawing/2014/main" id="{4B248C65-C22C-D461-178F-3BA9E253EE4F}"/>
+              </a:ext>
+            </a:extLst>
+          </p:cNvPr>
+          <p:cNvPicPr>
+            <a:picLocks noChangeAspect="1"/>
+          </p:cNvPicPr>
+          <p:nvPr/>
+        </p:nvPicPr>
+        <p:blipFill>
+          <a:blip r:embed="rId7"/>
+          <a:stretch>
+            <a:fillRect/>
+          </a:stretch>
+        </p:blipFill>
+        <p:spPr>
+          <a:xfrm>
+            <a:off x="8546591" y="5223872"/>
+            <a:ext cx="1325564" cy="1325564"/>
+          </a:xfrm>
+          <a:prstGeom prst="rect">
+            <a:avLst/>
+          </a:prstGeom>
+        </p:spPr>
+      </p:pic>
     </p:spTree>
     <p:extLst>
       <p:ext uri="{BB962C8B-B14F-4D97-AF65-F5344CB8AC3E}">
@@ -4721,6 +6610,268 @@
   <p:clrMapOvr>
     <a:masterClrMapping/>
   </p:clrMapOvr>
+  <p:timing>
+    <p:tnLst>
+      <p:par>
+        <p:cTn id="1" dur="indefinite" restart="never" nodeType="tmRoot">
+          <p:childTnLst>
+            <p:seq concurrent="1" nextAc="seek">
+              <p:cTn id="2" dur="indefinite" nodeType="mainSeq">
+                <p:childTnLst>
+                  <p:par>
+                    <p:cTn id="3" fill="hold">
+                      <p:stCondLst>
+                        <p:cond delay="indefinite"/>
+                        <p:cond evt="onBegin" delay="0">
+                          <p:tn val="2"/>
+                        </p:cond>
+                      </p:stCondLst>
+                      <p:childTnLst>
+                        <p:par>
+                          <p:cTn id="4" fill="hold">
+                            <p:stCondLst>
+                              <p:cond delay="0"/>
+                            </p:stCondLst>
+                            <p:childTnLst>
+                              <p:par>
+                                <p:cTn id="5" presetID="26" presetClass="emph" presetSubtype="0" repeatCount="indefinite" fill="hold" grpId="0" nodeType="withEffect">
+                                  <p:stCondLst>
+                                    <p:cond delay="0"/>
+                                  </p:stCondLst>
+                                  <p:childTnLst>
+                                    <p:animEffect transition="out" filter="fade">
+                                      <p:cBhvr>
+                                        <p:cTn id="6" dur="2000" tmFilter="0, 0; .2, .5; .8, .5; 1, 0"/>
+                                        <p:tgtEl>
+                                          <p:spTgt spid="7"/>
+                                        </p:tgtEl>
+                                      </p:cBhvr>
+                                    </p:animEffect>
+                                    <p:animScale>
+                                      <p:cBhvr>
+                                        <p:cTn id="7" dur="1000" autoRev="1" fill="hold"/>
+                                        <p:tgtEl>
+                                          <p:spTgt spid="7"/>
+                                        </p:tgtEl>
+                                      </p:cBhvr>
+                                      <p:by x="105000" y="105000"/>
+                                    </p:animScale>
+                                  </p:childTnLst>
+                                </p:cTn>
+                              </p:par>
+                              <p:par>
+                                <p:cTn id="8" presetID="32" presetClass="emph" presetSubtype="0" repeatCount="indefinite" fill="hold" nodeType="withEffect">
+                                  <p:stCondLst>
+                                    <p:cond delay="0"/>
+                                  </p:stCondLst>
+                                  <p:endCondLst>
+                                    <p:cond evt="onNext" delay="0">
+                                      <p:tgtEl>
+                                        <p:sldTgt/>
+                                      </p:tgtEl>
+                                    </p:cond>
+                                  </p:endCondLst>
+                                  <p:childTnLst>
+                                    <p:animRot by="120000">
+                                      <p:cBhvr>
+                                        <p:cTn id="9" dur="200" fill="hold">
+                                          <p:stCondLst>
+                                            <p:cond delay="0"/>
+                                          </p:stCondLst>
+                                        </p:cTn>
+                                        <p:tgtEl>
+                                          <p:spTgt spid="6"/>
+                                        </p:tgtEl>
+                                        <p:attrNameLst>
+                                          <p:attrName>r</p:attrName>
+                                        </p:attrNameLst>
+                                      </p:cBhvr>
+                                    </p:animRot>
+                                    <p:animRot by="-240000">
+                                      <p:cBhvr>
+                                        <p:cTn id="10" dur="400" fill="hold">
+                                          <p:stCondLst>
+                                            <p:cond delay="400"/>
+                                          </p:stCondLst>
+                                        </p:cTn>
+                                        <p:tgtEl>
+                                          <p:spTgt spid="6"/>
+                                        </p:tgtEl>
+                                        <p:attrNameLst>
+                                          <p:attrName>r</p:attrName>
+                                        </p:attrNameLst>
+                                      </p:cBhvr>
+                                    </p:animRot>
+                                    <p:animRot by="240000">
+                                      <p:cBhvr>
+                                        <p:cTn id="11" dur="400" fill="hold">
+                                          <p:stCondLst>
+                                            <p:cond delay="800"/>
+                                          </p:stCondLst>
+                                        </p:cTn>
+                                        <p:tgtEl>
+                                          <p:spTgt spid="6"/>
+                                        </p:tgtEl>
+                                        <p:attrNameLst>
+                                          <p:attrName>r</p:attrName>
+                                        </p:attrNameLst>
+                                      </p:cBhvr>
+                                    </p:animRot>
+                                    <p:animRot by="-240000">
+                                      <p:cBhvr>
+                                        <p:cTn id="12" dur="400" fill="hold">
+                                          <p:stCondLst>
+                                            <p:cond delay="1200"/>
+                                          </p:stCondLst>
+                                        </p:cTn>
+                                        <p:tgtEl>
+                                          <p:spTgt spid="6"/>
+                                        </p:tgtEl>
+                                        <p:attrNameLst>
+                                          <p:attrName>r</p:attrName>
+                                        </p:attrNameLst>
+                                      </p:cBhvr>
+                                    </p:animRot>
+                                    <p:animRot by="120000">
+                                      <p:cBhvr>
+                                        <p:cTn id="13" dur="400" fill="hold">
+                                          <p:stCondLst>
+                                            <p:cond delay="1600"/>
+                                          </p:stCondLst>
+                                        </p:cTn>
+                                        <p:tgtEl>
+                                          <p:spTgt spid="6"/>
+                                        </p:tgtEl>
+                                        <p:attrNameLst>
+                                          <p:attrName>r</p:attrName>
+                                        </p:attrNameLst>
+                                      </p:cBhvr>
+                                    </p:animRot>
+                                  </p:childTnLst>
+                                </p:cTn>
+                              </p:par>
+                              <p:par>
+                                <p:cTn id="14" presetID="32" presetClass="emph" presetSubtype="0" repeatCount="indefinite" fill="hold" nodeType="withEffect">
+                                  <p:stCondLst>
+                                    <p:cond delay="0"/>
+                                  </p:stCondLst>
+                                  <p:endCondLst>
+                                    <p:cond evt="onNext" delay="0">
+                                      <p:tgtEl>
+                                        <p:sldTgt/>
+                                      </p:tgtEl>
+                                    </p:cond>
+                                  </p:endCondLst>
+                                  <p:childTnLst>
+                                    <p:animRot by="120000">
+                                      <p:cBhvr>
+                                        <p:cTn id="15" dur="200" fill="hold">
+                                          <p:stCondLst>
+                                            <p:cond delay="0"/>
+                                          </p:stCondLst>
+                                        </p:cTn>
+                                        <p:tgtEl>
+                                          <p:spTgt spid="9"/>
+                                        </p:tgtEl>
+                                        <p:attrNameLst>
+                                          <p:attrName>r</p:attrName>
+                                        </p:attrNameLst>
+                                      </p:cBhvr>
+                                    </p:animRot>
+                                    <p:animRot by="-240000">
+                                      <p:cBhvr>
+                                        <p:cTn id="16" dur="400" fill="hold">
+                                          <p:stCondLst>
+                                            <p:cond delay="400"/>
+                                          </p:stCondLst>
+                                        </p:cTn>
+                                        <p:tgtEl>
+                                          <p:spTgt spid="9"/>
+                                        </p:tgtEl>
+                                        <p:attrNameLst>
+                                          <p:attrName>r</p:attrName>
+                                        </p:attrNameLst>
+                                      </p:cBhvr>
+                                    </p:animRot>
+                                    <p:animRot by="240000">
+                                      <p:cBhvr>
+                                        <p:cTn id="17" dur="400" fill="hold">
+                                          <p:stCondLst>
+                                            <p:cond delay="800"/>
+                                          </p:stCondLst>
+                                        </p:cTn>
+                                        <p:tgtEl>
+                                          <p:spTgt spid="9"/>
+                                        </p:tgtEl>
+                                        <p:attrNameLst>
+                                          <p:attrName>r</p:attrName>
+                                        </p:attrNameLst>
+                                      </p:cBhvr>
+                                    </p:animRot>
+                                    <p:animRot by="-240000">
+                                      <p:cBhvr>
+                                        <p:cTn id="18" dur="400" fill="hold">
+                                          <p:stCondLst>
+                                            <p:cond delay="1200"/>
+                                          </p:stCondLst>
+                                        </p:cTn>
+                                        <p:tgtEl>
+                                          <p:spTgt spid="9"/>
+                                        </p:tgtEl>
+                                        <p:attrNameLst>
+                                          <p:attrName>r</p:attrName>
+                                        </p:attrNameLst>
+                                      </p:cBhvr>
+                                    </p:animRot>
+                                    <p:animRot by="120000">
+                                      <p:cBhvr>
+                                        <p:cTn id="19" dur="400" fill="hold">
+                                          <p:stCondLst>
+                                            <p:cond delay="1600"/>
+                                          </p:stCondLst>
+                                        </p:cTn>
+                                        <p:tgtEl>
+                                          <p:spTgt spid="9"/>
+                                        </p:tgtEl>
+                                        <p:attrNameLst>
+                                          <p:attrName>r</p:attrName>
+                                        </p:attrNameLst>
+                                      </p:cBhvr>
+                                    </p:animRot>
+                                  </p:childTnLst>
+                                </p:cTn>
+                              </p:par>
+                            </p:childTnLst>
+                          </p:cTn>
+                        </p:par>
+                      </p:childTnLst>
+                    </p:cTn>
+                  </p:par>
+                </p:childTnLst>
+              </p:cTn>
+              <p:prevCondLst>
+                <p:cond evt="onPrev" delay="0">
+                  <p:tgtEl>
+                    <p:sldTgt/>
+                  </p:tgtEl>
+                </p:cond>
+              </p:prevCondLst>
+              <p:nextCondLst>
+                <p:cond evt="onNext" delay="0">
+                  <p:tgtEl>
+                    <p:sldTgt/>
+                  </p:tgtEl>
+                </p:cond>
+              </p:nextCondLst>
+            </p:seq>
+          </p:childTnLst>
+        </p:cTn>
+      </p:par>
+    </p:tnLst>
+    <p:bldLst>
+      <p:bldP spid="7" grpId="0" animBg="1"/>
+    </p:bldLst>
+  </p:timing>
 </p:sld>
 </file>
 
@@ -4968,7 +7119,7 @@
       <p:sp>
         <p:nvSpPr>
           <p:cNvPr id="10" name="Nyíl: balra mutató 9">
-            <a:hlinkClick r:id="" action="ppaction://hlinkshowjump?jump=nextslide"/>
+            <a:hlinkClick r:id="rId4" action="ppaction://hlinksldjump"/>
             <a:extLst>
               <a:ext uri="{FF2B5EF4-FFF2-40B4-BE49-F238E27FC236}">
                 <a16:creationId xmlns:a16="http://schemas.microsoft.com/office/drawing/2014/main" id="{82B771B0-99C0-90D6-7656-BDC8C429DD44}"/>
@@ -5055,7 +7206,7 @@
           <p:nvPr/>
         </p:nvPicPr>
         <p:blipFill>
-          <a:blip r:embed="rId4"/>
+          <a:blip r:embed="rId5"/>
           <a:stretch>
             <a:fillRect/>
           </a:stretch>
@@ -5080,6 +7231,113 @@
   <p:clrMapOvr>
     <a:masterClrMapping/>
   </p:clrMapOvr>
+  <p:timing>
+    <p:tnLst>
+      <p:par>
+        <p:cTn id="1" dur="indefinite" restart="never" nodeType="tmRoot">
+          <p:childTnLst>
+            <p:seq concurrent="1" nextAc="seek">
+              <p:cTn id="2" dur="indefinite" nodeType="mainSeq">
+                <p:childTnLst>
+                  <p:par>
+                    <p:cTn id="3" fill="hold">
+                      <p:stCondLst>
+                        <p:cond delay="indefinite"/>
+                        <p:cond evt="onBegin" delay="0">
+                          <p:tn val="2"/>
+                        </p:cond>
+                      </p:stCondLst>
+                      <p:childTnLst>
+                        <p:par>
+                          <p:cTn id="4" fill="hold">
+                            <p:stCondLst>
+                              <p:cond delay="0"/>
+                            </p:stCondLst>
+                            <p:childTnLst>
+                              <p:par>
+                                <p:cTn id="5" presetID="26" presetClass="emph" presetSubtype="0" repeatCount="indefinite" fill="hold" grpId="0" nodeType="withEffect">
+                                  <p:stCondLst>
+                                    <p:cond delay="0"/>
+                                  </p:stCondLst>
+                                  <p:childTnLst>
+                                    <p:animEffect transition="out" filter="fade">
+                                      <p:cBhvr>
+                                        <p:cTn id="6" dur="2000" tmFilter="0, 0; .2, .5; .8, .5; 1, 0"/>
+                                        <p:tgtEl>
+                                          <p:spTgt spid="7"/>
+                                        </p:tgtEl>
+                                      </p:cBhvr>
+                                    </p:animEffect>
+                                    <p:animScale>
+                                      <p:cBhvr>
+                                        <p:cTn id="7" dur="1000" autoRev="1" fill="hold"/>
+                                        <p:tgtEl>
+                                          <p:spTgt spid="7"/>
+                                        </p:tgtEl>
+                                      </p:cBhvr>
+                                      <p:by x="105000" y="105000"/>
+                                    </p:animScale>
+                                  </p:childTnLst>
+                                </p:cTn>
+                              </p:par>
+                              <p:par>
+                                <p:cTn id="8" presetID="26" presetClass="emph" presetSubtype="0" repeatCount="indefinite" fill="hold" grpId="0" nodeType="withEffect">
+                                  <p:stCondLst>
+                                    <p:cond delay="0"/>
+                                  </p:stCondLst>
+                                  <p:childTnLst>
+                                    <p:animEffect transition="out" filter="fade">
+                                      <p:cBhvr>
+                                        <p:cTn id="9" dur="2000" tmFilter="0, 0; .2, .5; .8, .5; 1, 0"/>
+                                        <p:tgtEl>
+                                          <p:spTgt spid="10"/>
+                                        </p:tgtEl>
+                                      </p:cBhvr>
+                                    </p:animEffect>
+                                    <p:animScale>
+                                      <p:cBhvr>
+                                        <p:cTn id="10" dur="1000" autoRev="1" fill="hold"/>
+                                        <p:tgtEl>
+                                          <p:spTgt spid="10"/>
+                                        </p:tgtEl>
+                                      </p:cBhvr>
+                                      <p:by x="105000" y="105000"/>
+                                    </p:animScale>
+                                  </p:childTnLst>
+                                </p:cTn>
+                              </p:par>
+                            </p:childTnLst>
+                          </p:cTn>
+                        </p:par>
+                      </p:childTnLst>
+                    </p:cTn>
+                  </p:par>
+                </p:childTnLst>
+              </p:cTn>
+              <p:prevCondLst>
+                <p:cond evt="onPrev" delay="0">
+                  <p:tgtEl>
+                    <p:sldTgt/>
+                  </p:tgtEl>
+                </p:cond>
+              </p:prevCondLst>
+              <p:nextCondLst>
+                <p:cond evt="onNext" delay="0">
+                  <p:tgtEl>
+                    <p:sldTgt/>
+                  </p:tgtEl>
+                </p:cond>
+              </p:nextCondLst>
+            </p:seq>
+          </p:childTnLst>
+        </p:cTn>
+      </p:par>
+    </p:tnLst>
+    <p:bldLst>
+      <p:bldP spid="7" grpId="0" animBg="1"/>
+      <p:bldP spid="10" grpId="0" animBg="1"/>
+    </p:bldLst>
+  </p:timing>
 </p:sld>
 </file>
 
@@ -5261,6 +7519,397 @@
         </p:nvSpPr>
         <p:spPr>
           <a:xfrm>
+            <a:off x="2107235" y="5266422"/>
+            <a:ext cx="2875175" cy="1325563"/>
+          </a:xfrm>
+          <a:prstGeom prst="leftArrow">
+            <a:avLst/>
+          </a:prstGeom>
+          <a:solidFill>
+            <a:schemeClr val="bg1"/>
+          </a:solidFill>
+          <a:ln w="63500">
+            <a:gradFill>
+              <a:gsLst>
+                <a:gs pos="0">
+                  <a:schemeClr val="accent4">
+                    <a:lumMod val="75000"/>
+                  </a:schemeClr>
+                </a:gs>
+                <a:gs pos="100000">
+                  <a:schemeClr val="accent2">
+                    <a:lumMod val="50000"/>
+                  </a:schemeClr>
+                </a:gs>
+              </a:gsLst>
+              <a:lin ang="5400000" scaled="1"/>
+            </a:gradFill>
+          </a:ln>
+        </p:spPr>
+        <p:style>
+          <a:lnRef idx="2">
+            <a:schemeClr val="accent1">
+              <a:shade val="15000"/>
+            </a:schemeClr>
+          </a:lnRef>
+          <a:fillRef idx="1">
+            <a:schemeClr val="accent1"/>
+          </a:fillRef>
+          <a:effectRef idx="0">
+            <a:schemeClr val="accent1"/>
+          </a:effectRef>
+          <a:fontRef idx="minor">
+            <a:schemeClr val="lt1"/>
+          </a:fontRef>
+        </p:style>
+        <p:txBody>
+          <a:bodyPr rtlCol="0" anchor="ctr"/>
+          <a:lstStyle/>
+          <a:p>
+            <a:pPr algn="ctr"/>
+            <a:r>
+              <a:rPr lang="hu-HU" sz="3200" dirty="0">
+                <a:solidFill>
+                  <a:schemeClr val="tx1"/>
+                </a:solidFill>
+                <a:latin typeface="Comic Sans MS" panose="030F0702030302020204" pitchFamily="66" charset="0"/>
+              </a:rPr>
+              <a:t>Főmenü</a:t>
+            </a:r>
+          </a:p>
+        </p:txBody>
+      </p:sp>
+      <p:pic>
+        <p:nvPicPr>
+          <p:cNvPr id="6" name="Kép 5">
+            <a:extLst>
+              <a:ext uri="{FF2B5EF4-FFF2-40B4-BE49-F238E27FC236}">
+                <a16:creationId xmlns:a16="http://schemas.microsoft.com/office/drawing/2014/main" id="{26A94A27-57EB-C6C5-FE9D-727D1D3D0A5B}"/>
+              </a:ext>
+            </a:extLst>
+          </p:cNvPr>
+          <p:cNvPicPr>
+            <a:picLocks noChangeAspect="1"/>
+          </p:cNvPicPr>
+          <p:nvPr/>
+        </p:nvPicPr>
+        <p:blipFill>
+          <a:blip r:embed="rId4"/>
+          <a:stretch>
+            <a:fillRect/>
+          </a:stretch>
+        </p:blipFill>
+        <p:spPr>
+          <a:xfrm>
+            <a:off x="1985703" y="2314767"/>
+            <a:ext cx="8220592" cy="2612375"/>
+          </a:xfrm>
+          <a:prstGeom prst="rect">
+            <a:avLst/>
+          </a:prstGeom>
+        </p:spPr>
+      </p:pic>
+      <p:pic>
+        <p:nvPicPr>
+          <p:cNvPr id="8" name="Kép 7">
+            <a:extLst>
+              <a:ext uri="{FF2B5EF4-FFF2-40B4-BE49-F238E27FC236}">
+                <a16:creationId xmlns:a16="http://schemas.microsoft.com/office/drawing/2014/main" id="{627A5A4E-9472-7B7F-8CD2-C44297E9D9AB}"/>
+              </a:ext>
+            </a:extLst>
+          </p:cNvPr>
+          <p:cNvPicPr>
+            <a:picLocks noChangeAspect="1"/>
+          </p:cNvPicPr>
+          <p:nvPr/>
+        </p:nvPicPr>
+        <p:blipFill>
+          <a:blip r:embed="rId5"/>
+          <a:stretch>
+            <a:fillRect/>
+          </a:stretch>
+        </p:blipFill>
+        <p:spPr>
+          <a:xfrm>
+            <a:off x="1985703" y="2343224"/>
+            <a:ext cx="8220592" cy="2612376"/>
+          </a:xfrm>
+          <a:prstGeom prst="rect">
+            <a:avLst/>
+          </a:prstGeom>
+        </p:spPr>
+      </p:pic>
+    </p:spTree>
+    <p:extLst>
+      <p:ext uri="{BB962C8B-B14F-4D97-AF65-F5344CB8AC3E}">
+        <p14:creationId xmlns:p14="http://schemas.microsoft.com/office/powerpoint/2010/main" val="3770282579"/>
+      </p:ext>
+    </p:extLst>
+  </p:cSld>
+  <p:clrMapOvr>
+    <a:masterClrMapping/>
+  </p:clrMapOvr>
+  <p:timing>
+    <p:tnLst>
+      <p:par>
+        <p:cTn id="1" dur="indefinite" restart="never" nodeType="tmRoot">
+          <p:childTnLst>
+            <p:seq concurrent="1" nextAc="seek">
+              <p:cTn id="2" dur="indefinite" nodeType="mainSeq">
+                <p:childTnLst>
+                  <p:par>
+                    <p:cTn id="3" fill="hold">
+                      <p:stCondLst>
+                        <p:cond delay="indefinite"/>
+                        <p:cond evt="onBegin" delay="0">
+                          <p:tn val="2"/>
+                        </p:cond>
+                      </p:stCondLst>
+                      <p:childTnLst>
+                        <p:par>
+                          <p:cTn id="4" fill="hold">
+                            <p:stCondLst>
+                              <p:cond delay="0"/>
+                            </p:stCondLst>
+                            <p:childTnLst>
+                              <p:par>
+                                <p:cTn id="5" presetID="26" presetClass="emph" presetSubtype="0" repeatCount="indefinite" fill="hold" grpId="0" nodeType="withEffect">
+                                  <p:stCondLst>
+                                    <p:cond delay="0"/>
+                                  </p:stCondLst>
+                                  <p:childTnLst>
+                                    <p:animEffect transition="out" filter="fade">
+                                      <p:cBhvr>
+                                        <p:cTn id="6" dur="2000" tmFilter="0, 0; .2, .5; .8, .5; 1, 0"/>
+                                        <p:tgtEl>
+                                          <p:spTgt spid="7"/>
+                                        </p:tgtEl>
+                                      </p:cBhvr>
+                                    </p:animEffect>
+                                    <p:animScale>
+                                      <p:cBhvr>
+                                        <p:cTn id="7" dur="1000" autoRev="1" fill="hold"/>
+                                        <p:tgtEl>
+                                          <p:spTgt spid="7"/>
+                                        </p:tgtEl>
+                                      </p:cBhvr>
+                                      <p:by x="105000" y="105000"/>
+                                    </p:animScale>
+                                  </p:childTnLst>
+                                </p:cTn>
+                              </p:par>
+                            </p:childTnLst>
+                          </p:cTn>
+                        </p:par>
+                      </p:childTnLst>
+                    </p:cTn>
+                  </p:par>
+                </p:childTnLst>
+              </p:cTn>
+              <p:prevCondLst>
+                <p:cond evt="onPrev" delay="0">
+                  <p:tgtEl>
+                    <p:sldTgt/>
+                  </p:tgtEl>
+                </p:cond>
+              </p:prevCondLst>
+              <p:nextCondLst>
+                <p:cond evt="onNext" delay="0">
+                  <p:tgtEl>
+                    <p:sldTgt/>
+                  </p:tgtEl>
+                </p:cond>
+              </p:nextCondLst>
+            </p:seq>
+          </p:childTnLst>
+        </p:cTn>
+      </p:par>
+    </p:tnLst>
+    <p:bldLst>
+      <p:bldP spid="7" grpId="0" animBg="1"/>
+    </p:bldLst>
+  </p:timing>
+</p:sld>
+</file>
+
+<file path=ppt/slides/slide8.xml><?xml version="1.0" encoding="utf-8"?>
+<p:sld xmlns:a="http://schemas.openxmlformats.org/drawingml/2006/main" xmlns:r="http://schemas.openxmlformats.org/officeDocument/2006/relationships" xmlns:p="http://schemas.openxmlformats.org/presentationml/2006/main">
+  <p:cSld>
+    <p:bg>
+      <p:bgPr>
+        <a:gradFill>
+          <a:gsLst>
+            <a:gs pos="0">
+              <a:schemeClr val="accent4">
+                <a:lumMod val="75000"/>
+              </a:schemeClr>
+            </a:gs>
+            <a:gs pos="100000">
+              <a:schemeClr val="accent2">
+                <a:lumMod val="50000"/>
+              </a:schemeClr>
+            </a:gs>
+          </a:gsLst>
+          <a:lin ang="5400000" scaled="1"/>
+        </a:gradFill>
+        <a:effectLst/>
+      </p:bgPr>
+    </p:bg>
+    <p:spTree>
+      <p:nvGrpSpPr>
+        <p:cNvPr id="1" name="">
+          <a:extLst>
+            <a:ext uri="{FF2B5EF4-FFF2-40B4-BE49-F238E27FC236}">
+              <a16:creationId xmlns:a16="http://schemas.microsoft.com/office/drawing/2014/main" id="{2FE11DE8-274D-BCB6-0DAD-197C8A6CBDB6}"/>
+            </a:ext>
+          </a:extLst>
+        </p:cNvPr>
+        <p:cNvGrpSpPr/>
+        <p:nvPr/>
+      </p:nvGrpSpPr>
+      <p:grpSpPr>
+        <a:xfrm>
+          <a:off x="0" y="0"/>
+          <a:ext cx="0" cy="0"/>
+          <a:chOff x="0" y="0"/>
+          <a:chExt cx="0" cy="0"/>
+        </a:xfrm>
+      </p:grpSpPr>
+      <p:sp>
+        <p:nvSpPr>
+          <p:cNvPr id="2" name="Cím 1">
+            <a:extLst>
+              <a:ext uri="{FF2B5EF4-FFF2-40B4-BE49-F238E27FC236}">
+                <a16:creationId xmlns:a16="http://schemas.microsoft.com/office/drawing/2014/main" id="{E78C2B89-42C4-768B-B664-C129E02DB8A7}"/>
+              </a:ext>
+            </a:extLst>
+          </p:cNvPr>
+          <p:cNvSpPr>
+            <a:spLocks noGrp="1"/>
+          </p:cNvSpPr>
+          <p:nvPr>
+            <p:ph type="title"/>
+          </p:nvPr>
+        </p:nvSpPr>
+        <p:spPr>
+          <a:xfrm>
+            <a:off x="838199" y="-17650"/>
+            <a:ext cx="10515600" cy="1325563"/>
+          </a:xfrm>
+        </p:spPr>
+        <p:txBody>
+          <a:bodyPr/>
+          <a:lstStyle/>
+          <a:p>
+            <a:pPr algn="ctr"/>
+            <a:r>
+              <a:rPr lang="hu-HU" dirty="0">
+                <a:solidFill>
+                  <a:schemeClr val="bg1"/>
+                </a:solidFill>
+                <a:latin typeface="Comic Sans MS" panose="030F0702030302020204" pitchFamily="66" charset="0"/>
+              </a:rPr>
+              <a:t>Használati utasítás</a:t>
+            </a:r>
+          </a:p>
+        </p:txBody>
+      </p:sp>
+      <p:sp>
+        <p:nvSpPr>
+          <p:cNvPr id="3" name="Tartalom helye 2">
+            <a:extLst>
+              <a:ext uri="{FF2B5EF4-FFF2-40B4-BE49-F238E27FC236}">
+                <a16:creationId xmlns:a16="http://schemas.microsoft.com/office/drawing/2014/main" id="{80ACF073-3567-C179-F7C5-C743EA60CBD9}"/>
+              </a:ext>
+            </a:extLst>
+          </p:cNvPr>
+          <p:cNvSpPr>
+            <a:spLocks noGrp="1"/>
+          </p:cNvSpPr>
+          <p:nvPr>
+            <p:ph idx="1"/>
+          </p:nvPr>
+        </p:nvSpPr>
+        <p:spPr>
+          <a:xfrm>
+            <a:off x="537131" y="1253331"/>
+            <a:ext cx="11117736" cy="4351338"/>
+          </a:xfrm>
+        </p:spPr>
+        <p:txBody>
+          <a:bodyPr/>
+          <a:lstStyle/>
+          <a:p>
+            <a:pPr algn="ctr"/>
+            <a:r>
+              <a:rPr lang="hu-HU" dirty="0">
+                <a:solidFill>
+                  <a:schemeClr val="bg1"/>
+                </a:solidFill>
+                <a:latin typeface="Comic Sans MS" panose="030F0702030302020204" pitchFamily="66" charset="0"/>
+              </a:rPr>
+              <a:t>2-es opció kiválasztása után:</a:t>
+            </a:r>
+          </a:p>
+          <a:p>
+            <a:pPr algn="ctr"/>
+            <a:r>
+              <a:rPr lang="hu-HU" dirty="0">
+                <a:solidFill>
+                  <a:schemeClr val="bg1"/>
+                </a:solidFill>
+                <a:latin typeface="Comic Sans MS" panose="030F0702030302020204" pitchFamily="66" charset="0"/>
+              </a:rPr>
+              <a:t>Gépeljük be az adott településtípus előtti számot (1-6).</a:t>
+            </a:r>
+          </a:p>
+        </p:txBody>
+      </p:sp>
+      <p:pic>
+        <p:nvPicPr>
+          <p:cNvPr id="5" name="Kép 4">
+            <a:extLst>
+              <a:ext uri="{FF2B5EF4-FFF2-40B4-BE49-F238E27FC236}">
+                <a16:creationId xmlns:a16="http://schemas.microsoft.com/office/drawing/2014/main" id="{9E45F571-6AD2-FC1B-4678-3171E4EF8E15}"/>
+              </a:ext>
+            </a:extLst>
+          </p:cNvPr>
+          <p:cNvPicPr>
+            <a:picLocks noChangeAspect="1"/>
+          </p:cNvPicPr>
+          <p:nvPr/>
+        </p:nvPicPr>
+        <p:blipFill>
+          <a:blip r:embed="rId2"/>
+          <a:stretch>
+            <a:fillRect/>
+          </a:stretch>
+        </p:blipFill>
+        <p:spPr>
+          <a:xfrm>
+            <a:off x="1985703" y="2314768"/>
+            <a:ext cx="8220592" cy="2612375"/>
+          </a:xfrm>
+          <a:prstGeom prst="rect">
+            <a:avLst/>
+          </a:prstGeom>
+        </p:spPr>
+      </p:pic>
+      <p:sp>
+        <p:nvSpPr>
+          <p:cNvPr id="7" name="Nyíl: balra mutató 6">
+            <a:hlinkClick r:id="rId3" action="ppaction://hlinksldjump"/>
+            <a:extLst>
+              <a:ext uri="{FF2B5EF4-FFF2-40B4-BE49-F238E27FC236}">
+                <a16:creationId xmlns:a16="http://schemas.microsoft.com/office/drawing/2014/main" id="{48517B9C-C6AA-B38E-AC09-F25E4AFE6D2B}"/>
+              </a:ext>
+            </a:extLst>
+          </p:cNvPr>
+          <p:cNvSpPr/>
+          <p:nvPr/>
+        </p:nvSpPr>
+        <p:spPr>
+          <a:xfrm>
             <a:off x="1985703" y="5223873"/>
             <a:ext cx="2875175" cy="1325563"/>
           </a:xfrm>
@@ -5324,10 +7973,10 @@
       <p:sp>
         <p:nvSpPr>
           <p:cNvPr id="10" name="Nyíl: balra mutató 9">
-            <a:hlinkClick r:id="" action="ppaction://hlinkshowjump?jump=nextslide"/>
-            <a:extLst>
-              <a:ext uri="{FF2B5EF4-FFF2-40B4-BE49-F238E27FC236}">
-                <a16:creationId xmlns:a16="http://schemas.microsoft.com/office/drawing/2014/main" id="{81E929AB-DA17-CA54-634B-FC08846CF7E0}"/>
+            <a:hlinkClick r:id="rId4" action="ppaction://hlinksldjump"/>
+            <a:extLst>
+              <a:ext uri="{FF2B5EF4-FFF2-40B4-BE49-F238E27FC236}">
+                <a16:creationId xmlns:a16="http://schemas.microsoft.com/office/drawing/2014/main" id="{077E1122-9C58-31AE-51D0-E86FCECFA335}"/>
               </a:ext>
             </a:extLst>
           </p:cNvPr>
@@ -5401,7 +8050,7 @@
           <p:cNvPr id="6" name="Kép 5">
             <a:extLst>
               <a:ext uri="{FF2B5EF4-FFF2-40B4-BE49-F238E27FC236}">
-                <a16:creationId xmlns:a16="http://schemas.microsoft.com/office/drawing/2014/main" id="{26A94A27-57EB-C6C5-FE9D-727D1D3D0A5B}"/>
+                <a16:creationId xmlns:a16="http://schemas.microsoft.com/office/drawing/2014/main" id="{E6B24FD2-41CE-2C13-F519-96F3E054C306}"/>
               </a:ext>
             </a:extLst>
           </p:cNvPr>
@@ -5411,7 +8060,7 @@
           <p:nvPr/>
         </p:nvPicPr>
         <p:blipFill>
-          <a:blip r:embed="rId4"/>
+          <a:blip r:embed="rId5"/>
           <a:stretch>
             <a:fillRect/>
           </a:stretch>
@@ -5431,7 +8080,7 @@
           <p:cNvPr id="8" name="Kép 7">
             <a:extLst>
               <a:ext uri="{FF2B5EF4-FFF2-40B4-BE49-F238E27FC236}">
-                <a16:creationId xmlns:a16="http://schemas.microsoft.com/office/drawing/2014/main" id="{627A5A4E-9472-7B7F-8CD2-C44297E9D9AB}"/>
+                <a16:creationId xmlns:a16="http://schemas.microsoft.com/office/drawing/2014/main" id="{70ECB2AE-95CE-9DCA-775A-057B67AC8D44}"/>
               </a:ext>
             </a:extLst>
           </p:cNvPr>
@@ -5441,7 +8090,7 @@
           <p:nvPr/>
         </p:nvPicPr>
         <p:blipFill>
-          <a:blip r:embed="rId5"/>
+          <a:blip r:embed="rId6"/>
           <a:stretch>
             <a:fillRect/>
           </a:stretch>
@@ -5456,16 +8105,608 @@
           </a:prstGeom>
         </p:spPr>
       </p:pic>
+      <p:pic>
+        <p:nvPicPr>
+          <p:cNvPr id="9" name="Kép 8">
+            <a:extLst>
+              <a:ext uri="{FF2B5EF4-FFF2-40B4-BE49-F238E27FC236}">
+                <a16:creationId xmlns:a16="http://schemas.microsoft.com/office/drawing/2014/main" id="{E2F39682-D270-AAE2-8B13-CA6FE9FE5401}"/>
+              </a:ext>
+            </a:extLst>
+          </p:cNvPr>
+          <p:cNvPicPr>
+            <a:picLocks noChangeAspect="1"/>
+          </p:cNvPicPr>
+          <p:nvPr/>
+        </p:nvPicPr>
+        <p:blipFill>
+          <a:blip r:embed="rId7"/>
+          <a:stretch>
+            <a:fillRect/>
+          </a:stretch>
+        </p:blipFill>
+        <p:spPr>
+          <a:xfrm>
+            <a:off x="1986853" y="2314766"/>
+            <a:ext cx="8219442" cy="2639362"/>
+          </a:xfrm>
+          <a:prstGeom prst="rect">
+            <a:avLst/>
+          </a:prstGeom>
+        </p:spPr>
+      </p:pic>
     </p:spTree>
     <p:extLst>
       <p:ext uri="{BB962C8B-B14F-4D97-AF65-F5344CB8AC3E}">
-        <p14:creationId xmlns:p14="http://schemas.microsoft.com/office/powerpoint/2010/main" val="3770282579"/>
+        <p14:creationId xmlns:p14="http://schemas.microsoft.com/office/powerpoint/2010/main" val="403993902"/>
       </p:ext>
     </p:extLst>
   </p:cSld>
   <p:clrMapOvr>
     <a:masterClrMapping/>
   </p:clrMapOvr>
+</p:sld>
+</file>
+
+<file path=ppt/slides/slide9.xml><?xml version="1.0" encoding="utf-8"?>
+<p:sld xmlns:a="http://schemas.openxmlformats.org/drawingml/2006/main" xmlns:r="http://schemas.openxmlformats.org/officeDocument/2006/relationships" xmlns:p="http://schemas.openxmlformats.org/presentationml/2006/main">
+  <p:cSld>
+    <p:bg>
+      <p:bgPr>
+        <a:gradFill>
+          <a:gsLst>
+            <a:gs pos="0">
+              <a:schemeClr val="accent4">
+                <a:lumMod val="75000"/>
+              </a:schemeClr>
+            </a:gs>
+            <a:gs pos="100000">
+              <a:schemeClr val="accent2">
+                <a:lumMod val="50000"/>
+              </a:schemeClr>
+            </a:gs>
+          </a:gsLst>
+          <a:lin ang="5400000" scaled="1"/>
+        </a:gradFill>
+        <a:effectLst/>
+      </p:bgPr>
+    </p:bg>
+    <p:spTree>
+      <p:nvGrpSpPr>
+        <p:cNvPr id="1" name="">
+          <a:extLst>
+            <a:ext uri="{FF2B5EF4-FFF2-40B4-BE49-F238E27FC236}">
+              <a16:creationId xmlns:a16="http://schemas.microsoft.com/office/drawing/2014/main" id="{52A49EA9-F0E6-B3BE-15EB-BDBD61A34E2F}"/>
+            </a:ext>
+          </a:extLst>
+        </p:cNvPr>
+        <p:cNvGrpSpPr/>
+        <p:nvPr/>
+      </p:nvGrpSpPr>
+      <p:grpSpPr>
+        <a:xfrm>
+          <a:off x="0" y="0"/>
+          <a:ext cx="0" cy="0"/>
+          <a:chOff x="0" y="0"/>
+          <a:chExt cx="0" cy="0"/>
+        </a:xfrm>
+      </p:grpSpPr>
+      <p:sp>
+        <p:nvSpPr>
+          <p:cNvPr id="2" name="Cím 1">
+            <a:extLst>
+              <a:ext uri="{FF2B5EF4-FFF2-40B4-BE49-F238E27FC236}">
+                <a16:creationId xmlns:a16="http://schemas.microsoft.com/office/drawing/2014/main" id="{F88A90F2-03EC-C39D-1208-96911DF6749F}"/>
+              </a:ext>
+            </a:extLst>
+          </p:cNvPr>
+          <p:cNvSpPr>
+            <a:spLocks noGrp="1"/>
+          </p:cNvSpPr>
+          <p:nvPr>
+            <p:ph type="title"/>
+          </p:nvPr>
+        </p:nvSpPr>
+        <p:spPr>
+          <a:xfrm>
+            <a:off x="838199" y="-17650"/>
+            <a:ext cx="10515600" cy="1325563"/>
+          </a:xfrm>
+        </p:spPr>
+        <p:txBody>
+          <a:bodyPr/>
+          <a:lstStyle/>
+          <a:p>
+            <a:pPr algn="ctr"/>
+            <a:r>
+              <a:rPr lang="hu-HU" dirty="0">
+                <a:solidFill>
+                  <a:schemeClr val="bg1"/>
+                </a:solidFill>
+                <a:latin typeface="Comic Sans MS" panose="030F0702030302020204" pitchFamily="66" charset="0"/>
+              </a:rPr>
+              <a:t>Használati utasítás</a:t>
+            </a:r>
+          </a:p>
+        </p:txBody>
+      </p:sp>
+      <p:sp>
+        <p:nvSpPr>
+          <p:cNvPr id="3" name="Tartalom helye 2">
+            <a:extLst>
+              <a:ext uri="{FF2B5EF4-FFF2-40B4-BE49-F238E27FC236}">
+                <a16:creationId xmlns:a16="http://schemas.microsoft.com/office/drawing/2014/main" id="{67F6553F-BA0F-25A2-3837-CFA663CC3907}"/>
+              </a:ext>
+            </a:extLst>
+          </p:cNvPr>
+          <p:cNvSpPr>
+            <a:spLocks noGrp="1"/>
+          </p:cNvSpPr>
+          <p:nvPr>
+            <p:ph idx="1"/>
+          </p:nvPr>
+        </p:nvSpPr>
+        <p:spPr>
+          <a:xfrm>
+            <a:off x="537131" y="1253331"/>
+            <a:ext cx="11117736" cy="4351338"/>
+          </a:xfrm>
+        </p:spPr>
+        <p:txBody>
+          <a:bodyPr/>
+          <a:lstStyle/>
+          <a:p>
+            <a:pPr algn="ctr"/>
+            <a:r>
+              <a:rPr lang="hu-HU" dirty="0">
+                <a:solidFill>
+                  <a:schemeClr val="bg1"/>
+                </a:solidFill>
+                <a:latin typeface="Comic Sans MS" panose="030F0702030302020204" pitchFamily="66" charset="0"/>
+              </a:rPr>
+              <a:t>Pl.: 4-es opció(város) kiválasztása után:</a:t>
+            </a:r>
+          </a:p>
+          <a:p>
+            <a:pPr algn="ctr"/>
+            <a:r>
+              <a:rPr lang="hu-HU" dirty="0">
+                <a:solidFill>
+                  <a:schemeClr val="bg1"/>
+                </a:solidFill>
+                <a:latin typeface="Comic Sans MS" panose="030F0702030302020204" pitchFamily="66" charset="0"/>
+              </a:rPr>
+              <a:t>Kilistázza a városokat és lakosságszámukat</a:t>
+            </a:r>
+          </a:p>
+          <a:p>
+            <a:pPr algn="ctr"/>
+            <a:endParaRPr lang="hu-HU" dirty="0">
+              <a:solidFill>
+                <a:schemeClr val="bg1"/>
+              </a:solidFill>
+              <a:latin typeface="Comic Sans MS" panose="030F0702030302020204" pitchFamily="66" charset="0"/>
+            </a:endParaRPr>
+          </a:p>
+        </p:txBody>
+      </p:sp>
+      <p:pic>
+        <p:nvPicPr>
+          <p:cNvPr id="5" name="Kép 4">
+            <a:extLst>
+              <a:ext uri="{FF2B5EF4-FFF2-40B4-BE49-F238E27FC236}">
+                <a16:creationId xmlns:a16="http://schemas.microsoft.com/office/drawing/2014/main" id="{2EA4933E-2973-33A8-9796-8540BA8DF6FA}"/>
+              </a:ext>
+            </a:extLst>
+          </p:cNvPr>
+          <p:cNvPicPr>
+            <a:picLocks noChangeAspect="1"/>
+          </p:cNvPicPr>
+          <p:nvPr/>
+        </p:nvPicPr>
+        <p:blipFill>
+          <a:blip r:embed="rId2"/>
+          <a:stretch>
+            <a:fillRect/>
+          </a:stretch>
+        </p:blipFill>
+        <p:spPr>
+          <a:xfrm>
+            <a:off x="1985703" y="2314768"/>
+            <a:ext cx="8220592" cy="2612375"/>
+          </a:xfrm>
+          <a:prstGeom prst="rect">
+            <a:avLst/>
+          </a:prstGeom>
+        </p:spPr>
+      </p:pic>
+      <p:sp>
+        <p:nvSpPr>
+          <p:cNvPr id="7" name="Nyíl: balra mutató 6">
+            <a:hlinkClick r:id="rId3" action="ppaction://hlinksldjump"/>
+            <a:extLst>
+              <a:ext uri="{FF2B5EF4-FFF2-40B4-BE49-F238E27FC236}">
+                <a16:creationId xmlns:a16="http://schemas.microsoft.com/office/drawing/2014/main" id="{02A0A98D-313A-7512-7C23-6CAE3EE9C220}"/>
+              </a:ext>
+            </a:extLst>
+          </p:cNvPr>
+          <p:cNvSpPr/>
+          <p:nvPr/>
+        </p:nvSpPr>
+        <p:spPr>
+          <a:xfrm>
+            <a:off x="1985703" y="5223873"/>
+            <a:ext cx="2875175" cy="1325563"/>
+          </a:xfrm>
+          <a:prstGeom prst="leftArrow">
+            <a:avLst/>
+          </a:prstGeom>
+          <a:solidFill>
+            <a:schemeClr val="bg1"/>
+          </a:solidFill>
+          <a:ln w="63500">
+            <a:gradFill>
+              <a:gsLst>
+                <a:gs pos="0">
+                  <a:schemeClr val="accent4">
+                    <a:lumMod val="75000"/>
+                  </a:schemeClr>
+                </a:gs>
+                <a:gs pos="100000">
+                  <a:schemeClr val="accent2">
+                    <a:lumMod val="50000"/>
+                  </a:schemeClr>
+                </a:gs>
+              </a:gsLst>
+              <a:lin ang="5400000" scaled="1"/>
+            </a:gradFill>
+          </a:ln>
+        </p:spPr>
+        <p:style>
+          <a:lnRef idx="2">
+            <a:schemeClr val="accent1">
+              <a:shade val="15000"/>
+            </a:schemeClr>
+          </a:lnRef>
+          <a:fillRef idx="1">
+            <a:schemeClr val="accent1"/>
+          </a:fillRef>
+          <a:effectRef idx="0">
+            <a:schemeClr val="accent1"/>
+          </a:effectRef>
+          <a:fontRef idx="minor">
+            <a:schemeClr val="lt1"/>
+          </a:fontRef>
+        </p:style>
+        <p:txBody>
+          <a:bodyPr rtlCol="0" anchor="ctr"/>
+          <a:lstStyle/>
+          <a:p>
+            <a:pPr algn="ctr"/>
+            <a:r>
+              <a:rPr lang="hu-HU" sz="3200" dirty="0">
+                <a:solidFill>
+                  <a:schemeClr val="tx1"/>
+                </a:solidFill>
+                <a:latin typeface="Comic Sans MS" panose="030F0702030302020204" pitchFamily="66" charset="0"/>
+              </a:rPr>
+              <a:t>Főmenü</a:t>
+            </a:r>
+          </a:p>
+        </p:txBody>
+      </p:sp>
+      <p:sp>
+        <p:nvSpPr>
+          <p:cNvPr id="10" name="Nyíl: balra mutató 9">
+            <a:hlinkClick r:id="rId4" action="ppaction://hlinksldjump"/>
+            <a:extLst>
+              <a:ext uri="{FF2B5EF4-FFF2-40B4-BE49-F238E27FC236}">
+                <a16:creationId xmlns:a16="http://schemas.microsoft.com/office/drawing/2014/main" id="{A809207D-AC30-5AD8-3C73-D1D10F5A0F58}"/>
+              </a:ext>
+            </a:extLst>
+          </p:cNvPr>
+          <p:cNvSpPr/>
+          <p:nvPr/>
+        </p:nvSpPr>
+        <p:spPr>
+          <a:xfrm flipH="1">
+            <a:off x="7331124" y="5223872"/>
+            <a:ext cx="2875175" cy="1325563"/>
+          </a:xfrm>
+          <a:prstGeom prst="leftArrow">
+            <a:avLst/>
+          </a:prstGeom>
+          <a:solidFill>
+            <a:schemeClr val="bg1"/>
+          </a:solidFill>
+          <a:ln w="63500">
+            <a:gradFill>
+              <a:gsLst>
+                <a:gs pos="0">
+                  <a:schemeClr val="accent4">
+                    <a:lumMod val="75000"/>
+                  </a:schemeClr>
+                </a:gs>
+                <a:gs pos="100000">
+                  <a:schemeClr val="accent2">
+                    <a:lumMod val="50000"/>
+                  </a:schemeClr>
+                </a:gs>
+              </a:gsLst>
+              <a:lin ang="5400000" scaled="1"/>
+            </a:gradFill>
+          </a:ln>
+        </p:spPr>
+        <p:style>
+          <a:lnRef idx="2">
+            <a:schemeClr val="accent1">
+              <a:shade val="15000"/>
+            </a:schemeClr>
+          </a:lnRef>
+          <a:fillRef idx="1">
+            <a:schemeClr val="accent1"/>
+          </a:fillRef>
+          <a:effectRef idx="0">
+            <a:schemeClr val="accent1"/>
+          </a:effectRef>
+          <a:fontRef idx="minor">
+            <a:schemeClr val="lt1"/>
+          </a:fontRef>
+        </p:style>
+        <p:txBody>
+          <a:bodyPr vert="horz" rtlCol="0" anchor="ctr" anchorCtr="0"/>
+          <a:lstStyle/>
+          <a:p>
+            <a:pPr algn="ctr"/>
+            <a:r>
+              <a:rPr lang="hu-HU" sz="3200" dirty="0">
+                <a:solidFill>
+                  <a:schemeClr val="tx1"/>
+                </a:solidFill>
+                <a:latin typeface="Comic Sans MS" panose="030F0702030302020204" pitchFamily="66" charset="0"/>
+              </a:rPr>
+              <a:t>Tovább</a:t>
+            </a:r>
+          </a:p>
+        </p:txBody>
+      </p:sp>
+      <p:pic>
+        <p:nvPicPr>
+          <p:cNvPr id="6" name="Kép 5">
+            <a:extLst>
+              <a:ext uri="{FF2B5EF4-FFF2-40B4-BE49-F238E27FC236}">
+                <a16:creationId xmlns:a16="http://schemas.microsoft.com/office/drawing/2014/main" id="{BE8F4132-5DEF-6EAA-0EE0-FFC728C04C54}"/>
+              </a:ext>
+            </a:extLst>
+          </p:cNvPr>
+          <p:cNvPicPr>
+            <a:picLocks noChangeAspect="1"/>
+          </p:cNvPicPr>
+          <p:nvPr/>
+        </p:nvPicPr>
+        <p:blipFill>
+          <a:blip r:embed="rId5"/>
+          <a:stretch>
+            <a:fillRect/>
+          </a:stretch>
+        </p:blipFill>
+        <p:spPr>
+          <a:xfrm>
+            <a:off x="1985703" y="2314767"/>
+            <a:ext cx="8220592" cy="2612375"/>
+          </a:xfrm>
+          <a:prstGeom prst="rect">
+            <a:avLst/>
+          </a:prstGeom>
+        </p:spPr>
+      </p:pic>
+      <p:pic>
+        <p:nvPicPr>
+          <p:cNvPr id="8" name="Kép 7">
+            <a:extLst>
+              <a:ext uri="{FF2B5EF4-FFF2-40B4-BE49-F238E27FC236}">
+                <a16:creationId xmlns:a16="http://schemas.microsoft.com/office/drawing/2014/main" id="{C11B611F-2854-F4CE-D110-FF66007EFB2C}"/>
+              </a:ext>
+            </a:extLst>
+          </p:cNvPr>
+          <p:cNvPicPr>
+            <a:picLocks noChangeAspect="1"/>
+          </p:cNvPicPr>
+          <p:nvPr/>
+        </p:nvPicPr>
+        <p:blipFill>
+          <a:blip r:embed="rId6"/>
+          <a:stretch>
+            <a:fillRect/>
+          </a:stretch>
+        </p:blipFill>
+        <p:spPr>
+          <a:xfrm>
+            <a:off x="1985703" y="2343224"/>
+            <a:ext cx="8220592" cy="2612376"/>
+          </a:xfrm>
+          <a:prstGeom prst="rect">
+            <a:avLst/>
+          </a:prstGeom>
+        </p:spPr>
+      </p:pic>
+      <p:pic>
+        <p:nvPicPr>
+          <p:cNvPr id="9" name="Kép 8">
+            <a:extLst>
+              <a:ext uri="{FF2B5EF4-FFF2-40B4-BE49-F238E27FC236}">
+                <a16:creationId xmlns:a16="http://schemas.microsoft.com/office/drawing/2014/main" id="{F5D25865-97C8-ACB0-2457-0836FE7EE93F}"/>
+              </a:ext>
+            </a:extLst>
+          </p:cNvPr>
+          <p:cNvPicPr>
+            <a:picLocks noChangeAspect="1"/>
+          </p:cNvPicPr>
+          <p:nvPr/>
+        </p:nvPicPr>
+        <p:blipFill>
+          <a:blip r:embed="rId7"/>
+          <a:stretch>
+            <a:fillRect/>
+          </a:stretch>
+        </p:blipFill>
+        <p:spPr>
+          <a:xfrm>
+            <a:off x="1986853" y="2314766"/>
+            <a:ext cx="8219442" cy="2639362"/>
+          </a:xfrm>
+          <a:prstGeom prst="rect">
+            <a:avLst/>
+          </a:prstGeom>
+        </p:spPr>
+      </p:pic>
+      <p:pic>
+        <p:nvPicPr>
+          <p:cNvPr id="11" name="Kép 10">
+            <a:extLst>
+              <a:ext uri="{FF2B5EF4-FFF2-40B4-BE49-F238E27FC236}">
+                <a16:creationId xmlns:a16="http://schemas.microsoft.com/office/drawing/2014/main" id="{74DCC9FD-BA60-227A-3C71-B4C0E9069B6D}"/>
+              </a:ext>
+            </a:extLst>
+          </p:cNvPr>
+          <p:cNvPicPr>
+            <a:picLocks noChangeAspect="1"/>
+          </p:cNvPicPr>
+          <p:nvPr/>
+        </p:nvPicPr>
+        <p:blipFill>
+          <a:blip r:embed="rId8"/>
+          <a:stretch>
+            <a:fillRect/>
+          </a:stretch>
+        </p:blipFill>
+        <p:spPr>
+          <a:xfrm>
+            <a:off x="1986278" y="2314766"/>
+            <a:ext cx="8219442" cy="2639362"/>
+          </a:xfrm>
+          <a:prstGeom prst="rect">
+            <a:avLst/>
+          </a:prstGeom>
+        </p:spPr>
+      </p:pic>
+    </p:spTree>
+    <p:extLst>
+      <p:ext uri="{BB962C8B-B14F-4D97-AF65-F5344CB8AC3E}">
+        <p14:creationId xmlns:p14="http://schemas.microsoft.com/office/powerpoint/2010/main" val="296464510"/>
+      </p:ext>
+    </p:extLst>
+  </p:cSld>
+  <p:clrMapOvr>
+    <a:masterClrMapping/>
+  </p:clrMapOvr>
+  <p:timing>
+    <p:tnLst>
+      <p:par>
+        <p:cTn id="1" dur="indefinite" restart="never" nodeType="tmRoot">
+          <p:childTnLst>
+            <p:seq concurrent="1" nextAc="seek">
+              <p:cTn id="2" dur="indefinite" nodeType="mainSeq">
+                <p:childTnLst>
+                  <p:par>
+                    <p:cTn id="3" fill="hold">
+                      <p:stCondLst>
+                        <p:cond delay="indefinite"/>
+                        <p:cond evt="onBegin" delay="0">
+                          <p:tn val="2"/>
+                        </p:cond>
+                      </p:stCondLst>
+                      <p:childTnLst>
+                        <p:par>
+                          <p:cTn id="4" fill="hold">
+                            <p:stCondLst>
+                              <p:cond delay="0"/>
+                            </p:stCondLst>
+                            <p:childTnLst>
+                              <p:par>
+                                <p:cTn id="5" presetID="26" presetClass="emph" presetSubtype="0" repeatCount="indefinite" fill="hold" grpId="0" nodeType="withEffect">
+                                  <p:stCondLst>
+                                    <p:cond delay="0"/>
+                                  </p:stCondLst>
+                                  <p:childTnLst>
+                                    <p:animEffect transition="out" filter="fade">
+                                      <p:cBhvr>
+                                        <p:cTn id="6" dur="2000" tmFilter="0, 0; .2, .5; .8, .5; 1, 0"/>
+                                        <p:tgtEl>
+                                          <p:spTgt spid="7"/>
+                                        </p:tgtEl>
+                                      </p:cBhvr>
+                                    </p:animEffect>
+                                    <p:animScale>
+                                      <p:cBhvr>
+                                        <p:cTn id="7" dur="1000" autoRev="1" fill="hold"/>
+                                        <p:tgtEl>
+                                          <p:spTgt spid="7"/>
+                                        </p:tgtEl>
+                                      </p:cBhvr>
+                                      <p:by x="105000" y="105000"/>
+                                    </p:animScale>
+                                  </p:childTnLst>
+                                </p:cTn>
+                              </p:par>
+                              <p:par>
+                                <p:cTn id="8" presetID="26" presetClass="emph" presetSubtype="0" repeatCount="indefinite" fill="hold" grpId="0" nodeType="withEffect">
+                                  <p:stCondLst>
+                                    <p:cond delay="0"/>
+                                  </p:stCondLst>
+                                  <p:childTnLst>
+                                    <p:animEffect transition="out" filter="fade">
+                                      <p:cBhvr>
+                                        <p:cTn id="9" dur="2000" tmFilter="0, 0; .2, .5; .8, .5; 1, 0"/>
+                                        <p:tgtEl>
+                                          <p:spTgt spid="10"/>
+                                        </p:tgtEl>
+                                      </p:cBhvr>
+                                    </p:animEffect>
+                                    <p:animScale>
+                                      <p:cBhvr>
+                                        <p:cTn id="10" dur="1000" autoRev="1" fill="hold"/>
+                                        <p:tgtEl>
+                                          <p:spTgt spid="10"/>
+                                        </p:tgtEl>
+                                      </p:cBhvr>
+                                      <p:by x="105000" y="105000"/>
+                                    </p:animScale>
+                                  </p:childTnLst>
+                                </p:cTn>
+                              </p:par>
+                            </p:childTnLst>
+                          </p:cTn>
+                        </p:par>
+                      </p:childTnLst>
+                    </p:cTn>
+                  </p:par>
+                </p:childTnLst>
+              </p:cTn>
+              <p:prevCondLst>
+                <p:cond evt="onPrev" delay="0">
+                  <p:tgtEl>
+                    <p:sldTgt/>
+                  </p:tgtEl>
+                </p:cond>
+              </p:prevCondLst>
+              <p:nextCondLst>
+                <p:cond evt="onNext" delay="0">
+                  <p:tgtEl>
+                    <p:sldTgt/>
+                  </p:tgtEl>
+                </p:cond>
+              </p:nextCondLst>
+            </p:seq>
+          </p:childTnLst>
+        </p:cTn>
+      </p:par>
+    </p:tnLst>
+    <p:bldLst>
+      <p:bldP spid="7" grpId="0" animBg="1"/>
+      <p:bldP spid="10" grpId="0" animBg="1"/>
+    </p:bldLst>
+  </p:timing>
 </p:sld>
 </file>
 

--- a/Népességszámlálás 2025.pptx
+++ b/Népességszámlálás 2025.pptx
@@ -268,7 +268,7 @@
           <a:p>
             <a:fld id="{FD7D69B1-10D7-4CD1-84F8-7D7D689F1ECE}" type="datetimeFigureOut">
               <a:rPr lang="hu-HU" smtClean="0"/>
-              <a:t>2026. 09. 16.</a:t>
+              <a:t>2026. 09. 18.</a:t>
             </a:fld>
             <a:endParaRPr lang="hu-HU"/>
           </a:p>
@@ -338,6 +338,18 @@
   <p:clrMapOvr>
     <a:masterClrMapping/>
   </p:clrMapOvr>
+  <mc:AlternateContent xmlns:mc="http://schemas.openxmlformats.org/markup-compatibility/2006">
+    <mc:Choice xmlns:p14="http://schemas.microsoft.com/office/powerpoint/2010/main" Requires="p14">
+      <p:transition spd="med" p14:dur="700" advClick="0" advTm="65000">
+        <p:fade/>
+      </p:transition>
+    </mc:Choice>
+    <mc:Fallback>
+      <p:transition spd="med" advClick="0" advTm="65000">
+        <p:fade/>
+      </p:transition>
+    </mc:Fallback>
+  </mc:AlternateContent>
 </p:sldLayout>
 </file>
 
@@ -466,7 +478,7 @@
           <a:p>
             <a:fld id="{FD7D69B1-10D7-4CD1-84F8-7D7D689F1ECE}" type="datetimeFigureOut">
               <a:rPr lang="hu-HU" smtClean="0"/>
-              <a:t>2026. 09. 16.</a:t>
+              <a:t>2026. 09. 18.</a:t>
             </a:fld>
             <a:endParaRPr lang="hu-HU"/>
           </a:p>
@@ -536,6 +548,18 @@
   <p:clrMapOvr>
     <a:masterClrMapping/>
   </p:clrMapOvr>
+  <mc:AlternateContent xmlns:mc="http://schemas.openxmlformats.org/markup-compatibility/2006">
+    <mc:Choice xmlns:p14="http://schemas.microsoft.com/office/powerpoint/2010/main" Requires="p14">
+      <p:transition spd="med" p14:dur="700" advClick="0" advTm="65000">
+        <p:fade/>
+      </p:transition>
+    </mc:Choice>
+    <mc:Fallback>
+      <p:transition spd="med" advClick="0" advTm="65000">
+        <p:fade/>
+      </p:transition>
+    </mc:Fallback>
+  </mc:AlternateContent>
 </p:sldLayout>
 </file>
 
@@ -674,7 +698,7 @@
           <a:p>
             <a:fld id="{FD7D69B1-10D7-4CD1-84F8-7D7D689F1ECE}" type="datetimeFigureOut">
               <a:rPr lang="hu-HU" smtClean="0"/>
-              <a:t>2026. 09. 16.</a:t>
+              <a:t>2026. 09. 18.</a:t>
             </a:fld>
             <a:endParaRPr lang="hu-HU"/>
           </a:p>
@@ -744,6 +768,18 @@
   <p:clrMapOvr>
     <a:masterClrMapping/>
   </p:clrMapOvr>
+  <mc:AlternateContent xmlns:mc="http://schemas.openxmlformats.org/markup-compatibility/2006">
+    <mc:Choice xmlns:p14="http://schemas.microsoft.com/office/powerpoint/2010/main" Requires="p14">
+      <p:transition spd="med" p14:dur="700" advClick="0" advTm="65000">
+        <p:fade/>
+      </p:transition>
+    </mc:Choice>
+    <mc:Fallback>
+      <p:transition spd="med" advClick="0" advTm="65000">
+        <p:fade/>
+      </p:transition>
+    </mc:Fallback>
+  </mc:AlternateContent>
 </p:sldLayout>
 </file>
 
@@ -872,7 +908,7 @@
           <a:p>
             <a:fld id="{FD7D69B1-10D7-4CD1-84F8-7D7D689F1ECE}" type="datetimeFigureOut">
               <a:rPr lang="hu-HU" smtClean="0"/>
-              <a:t>2026. 09. 16.</a:t>
+              <a:t>2026. 09. 18.</a:t>
             </a:fld>
             <a:endParaRPr lang="hu-HU"/>
           </a:p>
@@ -942,6 +978,18 @@
   <p:clrMapOvr>
     <a:masterClrMapping/>
   </p:clrMapOvr>
+  <mc:AlternateContent xmlns:mc="http://schemas.openxmlformats.org/markup-compatibility/2006">
+    <mc:Choice xmlns:p14="http://schemas.microsoft.com/office/powerpoint/2010/main" Requires="p14">
+      <p:transition spd="med" p14:dur="700" advClick="0" advTm="65000">
+        <p:fade/>
+      </p:transition>
+    </mc:Choice>
+    <mc:Fallback>
+      <p:transition spd="med" advClick="0" advTm="65000">
+        <p:fade/>
+      </p:transition>
+    </mc:Fallback>
+  </mc:AlternateContent>
 </p:sldLayout>
 </file>
 
@@ -1147,7 +1195,7 @@
           <a:p>
             <a:fld id="{FD7D69B1-10D7-4CD1-84F8-7D7D689F1ECE}" type="datetimeFigureOut">
               <a:rPr lang="hu-HU" smtClean="0"/>
-              <a:t>2026. 09. 16.</a:t>
+              <a:t>2026. 09. 18.</a:t>
             </a:fld>
             <a:endParaRPr lang="hu-HU"/>
           </a:p>
@@ -1217,6 +1265,18 @@
   <p:clrMapOvr>
     <a:masterClrMapping/>
   </p:clrMapOvr>
+  <mc:AlternateContent xmlns:mc="http://schemas.openxmlformats.org/markup-compatibility/2006">
+    <mc:Choice xmlns:p14="http://schemas.microsoft.com/office/powerpoint/2010/main" Requires="p14">
+      <p:transition spd="med" p14:dur="700" advClick="0" advTm="65000">
+        <p:fade/>
+      </p:transition>
+    </mc:Choice>
+    <mc:Fallback>
+      <p:transition spd="med" advClick="0" advTm="65000">
+        <p:fade/>
+      </p:transition>
+    </mc:Fallback>
+  </mc:AlternateContent>
 </p:sldLayout>
 </file>
 
@@ -1412,7 +1472,7 @@
           <a:p>
             <a:fld id="{FD7D69B1-10D7-4CD1-84F8-7D7D689F1ECE}" type="datetimeFigureOut">
               <a:rPr lang="hu-HU" smtClean="0"/>
-              <a:t>2026. 09. 16.</a:t>
+              <a:t>2026. 09. 18.</a:t>
             </a:fld>
             <a:endParaRPr lang="hu-HU"/>
           </a:p>
@@ -1482,6 +1542,18 @@
   <p:clrMapOvr>
     <a:masterClrMapping/>
   </p:clrMapOvr>
+  <mc:AlternateContent xmlns:mc="http://schemas.openxmlformats.org/markup-compatibility/2006">
+    <mc:Choice xmlns:p14="http://schemas.microsoft.com/office/powerpoint/2010/main" Requires="p14">
+      <p:transition spd="med" p14:dur="700" advClick="0" advTm="65000">
+        <p:fade/>
+      </p:transition>
+    </mc:Choice>
+    <mc:Fallback>
+      <p:transition spd="med" advClick="0" advTm="65000">
+        <p:fade/>
+      </p:transition>
+    </mc:Fallback>
+  </mc:AlternateContent>
 </p:sldLayout>
 </file>
 
@@ -1824,7 +1896,7 @@
           <a:p>
             <a:fld id="{FD7D69B1-10D7-4CD1-84F8-7D7D689F1ECE}" type="datetimeFigureOut">
               <a:rPr lang="hu-HU" smtClean="0"/>
-              <a:t>2026. 09. 16.</a:t>
+              <a:t>2026. 09. 18.</a:t>
             </a:fld>
             <a:endParaRPr lang="hu-HU"/>
           </a:p>
@@ -1894,6 +1966,18 @@
   <p:clrMapOvr>
     <a:masterClrMapping/>
   </p:clrMapOvr>
+  <mc:AlternateContent xmlns:mc="http://schemas.openxmlformats.org/markup-compatibility/2006">
+    <mc:Choice xmlns:p14="http://schemas.microsoft.com/office/powerpoint/2010/main" Requires="p14">
+      <p:transition spd="med" p14:dur="700" advClick="0" advTm="65000">
+        <p:fade/>
+      </p:transition>
+    </mc:Choice>
+    <mc:Fallback>
+      <p:transition spd="med" advClick="0" advTm="65000">
+        <p:fade/>
+      </p:transition>
+    </mc:Fallback>
+  </mc:AlternateContent>
 </p:sldLayout>
 </file>
 
@@ -1965,7 +2049,7 @@
           <a:p>
             <a:fld id="{FD7D69B1-10D7-4CD1-84F8-7D7D689F1ECE}" type="datetimeFigureOut">
               <a:rPr lang="hu-HU" smtClean="0"/>
-              <a:t>2026. 09. 16.</a:t>
+              <a:t>2026. 09. 18.</a:t>
             </a:fld>
             <a:endParaRPr lang="hu-HU"/>
           </a:p>
@@ -2035,6 +2119,18 @@
   <p:clrMapOvr>
     <a:masterClrMapping/>
   </p:clrMapOvr>
+  <mc:AlternateContent xmlns:mc="http://schemas.openxmlformats.org/markup-compatibility/2006">
+    <mc:Choice xmlns:p14="http://schemas.microsoft.com/office/powerpoint/2010/main" Requires="p14">
+      <p:transition spd="med" p14:dur="700" advClick="0" advTm="65000">
+        <p:fade/>
+      </p:transition>
+    </mc:Choice>
+    <mc:Fallback>
+      <p:transition spd="med" advClick="0" advTm="65000">
+        <p:fade/>
+      </p:transition>
+    </mc:Fallback>
+  </mc:AlternateContent>
 </p:sldLayout>
 </file>
 
@@ -2078,7 +2174,7 @@
           <a:p>
             <a:fld id="{FD7D69B1-10D7-4CD1-84F8-7D7D689F1ECE}" type="datetimeFigureOut">
               <a:rPr lang="hu-HU" smtClean="0"/>
-              <a:t>2026. 09. 16.</a:t>
+              <a:t>2026. 09. 18.</a:t>
             </a:fld>
             <a:endParaRPr lang="hu-HU"/>
           </a:p>
@@ -2148,6 +2244,18 @@
   <p:clrMapOvr>
     <a:masterClrMapping/>
   </p:clrMapOvr>
+  <mc:AlternateContent xmlns:mc="http://schemas.openxmlformats.org/markup-compatibility/2006">
+    <mc:Choice xmlns:p14="http://schemas.microsoft.com/office/powerpoint/2010/main" Requires="p14">
+      <p:transition spd="med" p14:dur="700" advClick="0" advTm="65000">
+        <p:fade/>
+      </p:transition>
+    </mc:Choice>
+    <mc:Fallback>
+      <p:transition spd="med" advClick="0" advTm="65000">
+        <p:fade/>
+      </p:transition>
+    </mc:Fallback>
+  </mc:AlternateContent>
 </p:sldLayout>
 </file>
 
@@ -2389,7 +2497,7 @@
           <a:p>
             <a:fld id="{FD7D69B1-10D7-4CD1-84F8-7D7D689F1ECE}" type="datetimeFigureOut">
               <a:rPr lang="hu-HU" smtClean="0"/>
-              <a:t>2026. 09. 16.</a:t>
+              <a:t>2026. 09. 18.</a:t>
             </a:fld>
             <a:endParaRPr lang="hu-HU"/>
           </a:p>
@@ -2459,6 +2567,18 @@
   <p:clrMapOvr>
     <a:masterClrMapping/>
   </p:clrMapOvr>
+  <mc:AlternateContent xmlns:mc="http://schemas.openxmlformats.org/markup-compatibility/2006">
+    <mc:Choice xmlns:p14="http://schemas.microsoft.com/office/powerpoint/2010/main" Requires="p14">
+      <p:transition spd="med" p14:dur="700" advClick="0" advTm="65000">
+        <p:fade/>
+      </p:transition>
+    </mc:Choice>
+    <mc:Fallback>
+      <p:transition spd="med" advClick="0" advTm="65000">
+        <p:fade/>
+      </p:transition>
+    </mc:Fallback>
+  </mc:AlternateContent>
 </p:sldLayout>
 </file>
 
@@ -2677,7 +2797,7 @@
           <a:p>
             <a:fld id="{FD7D69B1-10D7-4CD1-84F8-7D7D689F1ECE}" type="datetimeFigureOut">
               <a:rPr lang="hu-HU" smtClean="0"/>
-              <a:t>2026. 09. 16.</a:t>
+              <a:t>2026. 09. 18.</a:t>
             </a:fld>
             <a:endParaRPr lang="hu-HU"/>
           </a:p>
@@ -2747,6 +2867,18 @@
   <p:clrMapOvr>
     <a:masterClrMapping/>
   </p:clrMapOvr>
+  <mc:AlternateContent xmlns:mc="http://schemas.openxmlformats.org/markup-compatibility/2006">
+    <mc:Choice xmlns:p14="http://schemas.microsoft.com/office/powerpoint/2010/main" Requires="p14">
+      <p:transition spd="med" p14:dur="700" advClick="0" advTm="65000">
+        <p:fade/>
+      </p:transition>
+    </mc:Choice>
+    <mc:Fallback>
+      <p:transition spd="med" advClick="0" advTm="65000">
+        <p:fade/>
+      </p:transition>
+    </mc:Fallback>
+  </mc:AlternateContent>
 </p:sldLayout>
 </file>
 
@@ -2918,7 +3050,7 @@
           <a:p>
             <a:fld id="{FD7D69B1-10D7-4CD1-84F8-7D7D689F1ECE}" type="datetimeFigureOut">
               <a:rPr lang="hu-HU" smtClean="0"/>
-              <a:t>2026. 09. 16.</a:t>
+              <a:t>2026. 09. 18.</a:t>
             </a:fld>
             <a:endParaRPr lang="hu-HU"/>
           </a:p>
@@ -3035,6 +3167,18 @@
     <p:sldLayoutId id="2147483658" r:id="rId10"/>
     <p:sldLayoutId id="2147483659" r:id="rId11"/>
   </p:sldLayoutIdLst>
+  <mc:AlternateContent xmlns:mc="http://schemas.openxmlformats.org/markup-compatibility/2006">
+    <mc:Choice xmlns:p14="http://schemas.microsoft.com/office/powerpoint/2010/main" Requires="p14">
+      <p:transition spd="med" p14:dur="700" advClick="0" advTm="65000">
+        <p:fade/>
+      </p:transition>
+    </mc:Choice>
+    <mc:Fallback>
+      <p:transition spd="med" advClick="0" advTm="65000">
+        <p:fade/>
+      </p:transition>
+    </mc:Fallback>
+  </mc:AlternateContent>
   <p:txStyles>
     <p:titleStyle>
       <a:lvl1pPr algn="l" defTabSz="914400" rtl="0" eaLnBrk="1" latinLnBrk="0" hangingPunct="1">
@@ -3437,9 +3581,18 @@
   <p:clrMapOvr>
     <a:masterClrMapping/>
   </p:clrMapOvr>
-  <p:transition spd="slow" advClick="0" advTm="1000">
-    <p:wipe/>
-  </p:transition>
+  <mc:AlternateContent xmlns:mc="http://schemas.openxmlformats.org/markup-compatibility/2006">
+    <mc:Choice xmlns:p14="http://schemas.microsoft.com/office/powerpoint/2010/main" Requires="p14">
+      <p:transition spd="med" p14:dur="700" advClick="0" advTm="5000">
+        <p:fade/>
+      </p:transition>
+    </mc:Choice>
+    <mc:Fallback>
+      <p:transition spd="med" advClick="0" advTm="5000">
+        <p:fade/>
+      </p:transition>
+    </mc:Fallback>
+  </mc:AlternateContent>
 </p:sld>
 </file>
 
@@ -3551,7 +3704,18 @@
           <a:bodyPr/>
           <a:lstStyle/>
           <a:p>
-            <a:pPr algn="ctr"/>
+            <a:pPr marL="0" indent="0" algn="ctr">
+              <a:buNone/>
+            </a:pPr>
+            <a:r>
+              <a:rPr lang="hu-HU" b="1" dirty="0">
+                <a:solidFill>
+                  <a:srgbClr val="FF0000"/>
+                </a:solidFill>
+                <a:latin typeface="Comic Sans MS" panose="030F0702030302020204" pitchFamily="66" charset="0"/>
+              </a:rPr>
+              <a:t>N</a:t>
+            </a:r>
             <a:r>
               <a:rPr lang="hu-HU" dirty="0">
                 <a:solidFill>
@@ -3559,11 +3723,17 @@
                 </a:solidFill>
                 <a:latin typeface="Comic Sans MS" panose="030F0702030302020204" pitchFamily="66" charset="0"/>
               </a:rPr>
-              <a:t>N-karakter begépelése után lapozni lehet.</a:t>
-            </a:r>
-          </a:p>
-          <a:p>
-            <a:pPr algn="ctr"/>
+              <a:t>-karakter begépelése után </a:t>
+            </a:r>
+            <a:r>
+              <a:rPr lang="hu-HU" b="1" dirty="0">
+                <a:solidFill>
+                  <a:srgbClr val="FF0000"/>
+                </a:solidFill>
+                <a:latin typeface="Comic Sans MS" panose="030F0702030302020204" pitchFamily="66" charset="0"/>
+              </a:rPr>
+              <a:t>lapozni</a:t>
+            </a:r>
             <a:r>
               <a:rPr lang="hu-HU" dirty="0">
                 <a:solidFill>
@@ -3571,11 +3741,22 @@
                 </a:solidFill>
                 <a:latin typeface="Comic Sans MS" panose="030F0702030302020204" pitchFamily="66" charset="0"/>
               </a:rPr>
-              <a:t>B-karakter begépelése után vissza lehet lapozni.</a:t>
-            </a:r>
-          </a:p>
-          <a:p>
-            <a:pPr algn="ctr"/>
+              <a:t> lehet.</a:t>
+            </a:r>
+          </a:p>
+          <a:p>
+            <a:pPr marL="0" indent="0" algn="ctr">
+              <a:buNone/>
+            </a:pPr>
+            <a:r>
+              <a:rPr lang="hu-HU" b="1" dirty="0">
+                <a:solidFill>
+                  <a:srgbClr val="FF0000"/>
+                </a:solidFill>
+                <a:latin typeface="Comic Sans MS" panose="030F0702030302020204" pitchFamily="66" charset="0"/>
+              </a:rPr>
+              <a:t>B</a:t>
+            </a:r>
             <a:r>
               <a:rPr lang="hu-HU" dirty="0">
                 <a:solidFill>
@@ -3583,7 +3764,66 @@
                 </a:solidFill>
                 <a:latin typeface="Comic Sans MS" panose="030F0702030302020204" pitchFamily="66" charset="0"/>
               </a:rPr>
-              <a:t>Q-karakter begépelése után a program visszatér a főmenübe.</a:t>
+              <a:t>-karakter begépelése után </a:t>
+            </a:r>
+            <a:r>
+              <a:rPr lang="hu-HU" b="1" dirty="0">
+                <a:solidFill>
+                  <a:srgbClr val="FF0000"/>
+                </a:solidFill>
+                <a:latin typeface="Comic Sans MS" panose="030F0702030302020204" pitchFamily="66" charset="0"/>
+              </a:rPr>
+              <a:t>vissza</a:t>
+            </a:r>
+            <a:r>
+              <a:rPr lang="hu-HU" dirty="0">
+                <a:solidFill>
+                  <a:schemeClr val="bg1"/>
+                </a:solidFill>
+                <a:latin typeface="Comic Sans MS" panose="030F0702030302020204" pitchFamily="66" charset="0"/>
+              </a:rPr>
+              <a:t> lehet lapozni.</a:t>
+            </a:r>
+          </a:p>
+          <a:p>
+            <a:pPr marL="0" indent="0" algn="ctr">
+              <a:buNone/>
+            </a:pPr>
+            <a:r>
+              <a:rPr lang="hu-HU" b="1" dirty="0">
+                <a:solidFill>
+                  <a:srgbClr val="FF0000"/>
+                </a:solidFill>
+                <a:latin typeface="Comic Sans MS" panose="030F0702030302020204" pitchFamily="66" charset="0"/>
+              </a:rPr>
+              <a:t>Q</a:t>
+            </a:r>
+            <a:r>
+              <a:rPr lang="hu-HU" dirty="0">
+                <a:solidFill>
+                  <a:schemeClr val="bg1"/>
+                </a:solidFill>
+                <a:latin typeface="Comic Sans MS" panose="030F0702030302020204" pitchFamily="66" charset="0"/>
+              </a:rPr>
+              <a:t>-karakter begépelése után a program visszatér a </a:t>
+            </a:r>
+            <a:r>
+              <a:rPr lang="hu-HU" b="1" dirty="0">
+                <a:solidFill>
+                  <a:srgbClr val="FF0000"/>
+                </a:solidFill>
+                <a:latin typeface="Comic Sans MS" panose="030F0702030302020204" pitchFamily="66" charset="0"/>
+              </a:rPr>
+              <a:t>főmenübe</a:t>
+            </a:r>
+            <a:r>
+              <a:rPr lang="hu-HU" dirty="0">
+                <a:solidFill>
+                  <a:schemeClr val="bg1"/>
+                </a:solidFill>
+                <a:latin typeface="Comic Sans MS" panose="030F0702030302020204" pitchFamily="66" charset="0"/>
+              </a:rPr>
+              <a:t>.</a:t>
             </a:r>
           </a:p>
           <a:p>
@@ -3841,6 +4081,18 @@
   <p:clrMapOvr>
     <a:masterClrMapping/>
   </p:clrMapOvr>
+  <mc:AlternateContent xmlns:mc="http://schemas.openxmlformats.org/markup-compatibility/2006">
+    <mc:Choice xmlns:p14="http://schemas.microsoft.com/office/powerpoint/2010/main" Requires="p14">
+      <p:transition spd="med" p14:dur="700" advClick="0" advTm="65000">
+        <p:fade/>
+      </p:transition>
+    </mc:Choice>
+    <mc:Fallback>
+      <p:transition spd="med" advClick="0" advTm="65000">
+        <p:fade/>
+      </p:transition>
+    </mc:Fallback>
+  </mc:AlternateContent>
   <p:timing>
     <p:tnLst>
       <p:par>
@@ -4320,12 +4572,12 @@
   </p:clrMapOvr>
   <mc:AlternateContent xmlns:mc="http://schemas.openxmlformats.org/markup-compatibility/2006">
     <mc:Choice xmlns:p14="http://schemas.microsoft.com/office/powerpoint/2010/main" Requires="p14">
-      <p:transition spd="med" p14:dur="700" advClick="0" advTm="5000">
+      <p:transition spd="med" p14:dur="700" advClick="0" advTm="65000">
         <p:fade/>
       </p:transition>
     </mc:Choice>
     <mc:Fallback>
-      <p:transition spd="med" advClick="0" advTm="5000">
+      <p:transition spd="med" advClick="0" advTm="65000">
         <p:fade/>
       </p:transition>
     </mc:Fallback>
@@ -4930,6 +5182,18 @@
   <p:clrMapOvr>
     <a:masterClrMapping/>
   </p:clrMapOvr>
+  <mc:AlternateContent xmlns:mc="http://schemas.openxmlformats.org/markup-compatibility/2006">
+    <mc:Choice xmlns:p14="http://schemas.microsoft.com/office/powerpoint/2010/main" Requires="p14">
+      <p:transition spd="med" p14:dur="700" advClick="0" advTm="65000">
+        <p:fade/>
+      </p:transition>
+    </mc:Choice>
+    <mc:Fallback>
+      <p:transition spd="med" advClick="0" advTm="65000">
+        <p:fade/>
+      </p:transition>
+    </mc:Fallback>
+  </mc:AlternateContent>
   <p:timing>
     <p:tnLst>
       <p:par>
@@ -5860,6 +6124,18 @@
   <p:clrMapOvr>
     <a:masterClrMapping/>
   </p:clrMapOvr>
+  <mc:AlternateContent xmlns:mc="http://schemas.openxmlformats.org/markup-compatibility/2006">
+    <mc:Choice xmlns:p14="http://schemas.microsoft.com/office/powerpoint/2010/main" Requires="p14">
+      <p:transition spd="med" p14:dur="700" advClick="0" advTm="65000">
+        <p:fade/>
+      </p:transition>
+    </mc:Choice>
+    <mc:Fallback>
+      <p:transition spd="med" advClick="0" advTm="65000">
+        <p:fade/>
+      </p:transition>
+    </mc:Fallback>
+  </mc:AlternateContent>
   <p:timing>
     <p:tnLst>
       <p:par>
@@ -6417,7 +6693,9 @@
           <a:bodyPr/>
           <a:lstStyle/>
           <a:p>
-            <a:pPr algn="ctr"/>
+            <a:pPr marL="0" indent="0" algn="ctr">
+              <a:buNone/>
+            </a:pPr>
             <a:r>
               <a:rPr lang="hu-HU" dirty="0">
                 <a:solidFill>
@@ -6610,6 +6888,18 @@
   <p:clrMapOvr>
     <a:masterClrMapping/>
   </p:clrMapOvr>
+  <mc:AlternateContent xmlns:mc="http://schemas.openxmlformats.org/markup-compatibility/2006">
+    <mc:Choice xmlns:p14="http://schemas.microsoft.com/office/powerpoint/2010/main" Requires="p14">
+      <p:transition spd="med" p14:dur="700" advClick="0" advTm="65000">
+        <p:fade/>
+      </p:transition>
+    </mc:Choice>
+    <mc:Fallback>
+      <p:transition spd="med" advClick="0" advTm="65000">
+        <p:fade/>
+      </p:transition>
+    </mc:Fallback>
+  </mc:AlternateContent>
   <p:timing>
     <p:tnLst>
       <p:par>
@@ -6983,7 +7273,18 @@
           <a:bodyPr/>
           <a:lstStyle/>
           <a:p>
-            <a:pPr algn="ctr"/>
+            <a:pPr marL="0" indent="0" algn="ctr">
+              <a:buNone/>
+            </a:pPr>
+            <a:r>
+              <a:rPr lang="hu-HU" b="1" dirty="0">
+                <a:solidFill>
+                  <a:srgbClr val="FF0000"/>
+                </a:solidFill>
+                <a:latin typeface="Comic Sans MS" panose="030F0702030302020204" pitchFamily="66" charset="0"/>
+              </a:rPr>
+              <a:t>1-es </a:t>
+            </a:r>
             <a:r>
               <a:rPr lang="hu-HU" dirty="0">
                 <a:solidFill>
@@ -6991,11 +7292,13 @@
                 </a:solidFill>
                 <a:latin typeface="Comic Sans MS" panose="030F0702030302020204" pitchFamily="66" charset="0"/>
               </a:rPr>
-              <a:t>1-es opció kiválasztása után:</a:t>
-            </a:r>
-          </a:p>
-          <a:p>
-            <a:pPr algn="ctr"/>
+              <a:t>opció kiválasztása után:</a:t>
+            </a:r>
+          </a:p>
+          <a:p>
+            <a:pPr marL="0" indent="0" algn="ctr">
+              <a:buNone/>
+            </a:pPr>
             <a:r>
               <a:rPr lang="hu-HU" dirty="0">
                 <a:solidFill>
@@ -7231,6 +7534,18 @@
   <p:clrMapOvr>
     <a:masterClrMapping/>
   </p:clrMapOvr>
+  <mc:AlternateContent xmlns:mc="http://schemas.openxmlformats.org/markup-compatibility/2006">
+    <mc:Choice xmlns:p14="http://schemas.microsoft.com/office/powerpoint/2010/main" Requires="p14">
+      <p:transition spd="med" p14:dur="700" advClick="0" advTm="65000">
+        <p:fade/>
+      </p:transition>
+    </mc:Choice>
+    <mc:Fallback>
+      <p:transition spd="med" advClick="0" advTm="65000">
+        <p:fade/>
+      </p:transition>
+    </mc:Fallback>
+  </mc:AlternateContent>
   <p:timing>
     <p:tnLst>
       <p:par>
@@ -7449,7 +7764,9 @@
           <a:bodyPr/>
           <a:lstStyle/>
           <a:p>
-            <a:pPr algn="ctr"/>
+            <a:pPr marL="0" indent="0" algn="ctr">
+              <a:buNone/>
+            </a:pPr>
             <a:r>
               <a:rPr lang="hu-HU" dirty="0">
                 <a:solidFill>
@@ -7461,7 +7778,9 @@
             </a:r>
           </a:p>
           <a:p>
-            <a:pPr algn="ctr"/>
+            <a:pPr marL="0" indent="0" algn="ctr">
+              <a:buNone/>
+            </a:pPr>
             <a:r>
               <a:rPr lang="hu-HU" dirty="0">
                 <a:solidFill>
@@ -7649,6 +7968,18 @@
   <p:clrMapOvr>
     <a:masterClrMapping/>
   </p:clrMapOvr>
+  <mc:AlternateContent xmlns:mc="http://schemas.openxmlformats.org/markup-compatibility/2006">
+    <mc:Choice xmlns:p14="http://schemas.microsoft.com/office/powerpoint/2010/main" Requires="p14">
+      <p:transition spd="med" p14:dur="700" advClick="0" advTm="65000">
+        <p:fade/>
+      </p:transition>
+    </mc:Choice>
+    <mc:Fallback>
+      <p:transition spd="med" advClick="0" advTm="65000">
+        <p:fade/>
+      </p:transition>
+    </mc:Fallback>
+  </mc:AlternateContent>
   <p:timing>
     <p:tnLst>
       <p:par>
@@ -7840,7 +8171,18 @@
           <a:bodyPr/>
           <a:lstStyle/>
           <a:p>
-            <a:pPr algn="ctr"/>
+            <a:pPr marL="0" indent="0" algn="ctr">
+              <a:buNone/>
+            </a:pPr>
+            <a:r>
+              <a:rPr lang="hu-HU" b="1" dirty="0">
+                <a:solidFill>
+                  <a:srgbClr val="FF0000"/>
+                </a:solidFill>
+                <a:latin typeface="Comic Sans MS" panose="030F0702030302020204" pitchFamily="66" charset="0"/>
+              </a:rPr>
+              <a:t>2-es</a:t>
+            </a:r>
             <a:r>
               <a:rPr lang="hu-HU" dirty="0">
                 <a:solidFill>
@@ -7848,11 +8190,13 @@
                 </a:solidFill>
                 <a:latin typeface="Comic Sans MS" panose="030F0702030302020204" pitchFamily="66" charset="0"/>
               </a:rPr>
-              <a:t>2-es opció kiválasztása után:</a:t>
-            </a:r>
-          </a:p>
-          <a:p>
-            <a:pPr algn="ctr"/>
+              <a:t> opció kiválasztása után:</a:t>
+            </a:r>
+          </a:p>
+          <a:p>
+            <a:pPr marL="0" indent="0" algn="ctr">
+              <a:buNone/>
+            </a:pPr>
             <a:r>
               <a:rPr lang="hu-HU" dirty="0">
                 <a:solidFill>
@@ -8145,6 +8489,18 @@
   <p:clrMapOvr>
     <a:masterClrMapping/>
   </p:clrMapOvr>
+  <mc:AlternateContent xmlns:mc="http://schemas.openxmlformats.org/markup-compatibility/2006">
+    <mc:Choice xmlns:p14="http://schemas.microsoft.com/office/powerpoint/2010/main" Requires="p14">
+      <p:transition spd="med" p14:dur="700" advClick="0" advTm="65000">
+        <p:fade/>
+      </p:transition>
+    </mc:Choice>
+    <mc:Fallback>
+      <p:transition spd="med" advClick="0" advTm="65000">
+        <p:fade/>
+      </p:transition>
+    </mc:Fallback>
+  </mc:AlternateContent>
 </p:sld>
 </file>
 
@@ -8256,7 +8612,9 @@
           <a:bodyPr/>
           <a:lstStyle/>
           <a:p>
-            <a:pPr algn="ctr"/>
+            <a:pPr marL="0" indent="0" algn="ctr">
+              <a:buNone/>
+            </a:pPr>
             <a:r>
               <a:rPr lang="hu-HU" dirty="0">
                 <a:solidFill>
@@ -8268,7 +8626,9 @@
             </a:r>
           </a:p>
           <a:p>
-            <a:pPr algn="ctr"/>
+            <a:pPr marL="0" indent="0" algn="ctr">
+              <a:buNone/>
+            </a:pPr>
             <a:r>
               <a:rPr lang="hu-HU" dirty="0">
                 <a:solidFill>
@@ -8600,6 +8960,18 @@
   <p:clrMapOvr>
     <a:masterClrMapping/>
   </p:clrMapOvr>
+  <mc:AlternateContent xmlns:mc="http://schemas.openxmlformats.org/markup-compatibility/2006">
+    <mc:Choice xmlns:p14="http://schemas.microsoft.com/office/powerpoint/2010/main" Requires="p14">
+      <p:transition spd="med" p14:dur="700" advClick="0" advTm="65000">
+        <p:fade/>
+      </p:transition>
+    </mc:Choice>
+    <mc:Fallback>
+      <p:transition spd="med" advClick="0" advTm="65000">
+        <p:fade/>
+      </p:transition>
+    </mc:Fallback>
+  </mc:AlternateContent>
   <p:timing>
     <p:tnLst>
       <p:par>
